--- a/Lectures/Chunk 3 - Logic Operators and If-Statements.pptx
+++ b/Lectures/Chunk 3 - Logic Operators and If-Statements.pptx
@@ -125,1082 +125,6 @@
 </p:presentation>
 </file>
 
-<file path=ppt/revisionInfo.xml><?xml version="1.0" encoding="utf-8"?>
-<p1510:revInfo xmlns:a="http://schemas.openxmlformats.org/drawingml/2006/main" xmlns:r="http://schemas.openxmlformats.org/officeDocument/2006/relationships" xmlns:p1510="http://schemas.microsoft.com/office/powerpoint/2015/10/main">
-  <p1510:revLst>
-    <p1510:client id="{27B0602A-098D-4D57-9A9B-544BF4245F2C}" v="52" dt="2025-10-04T12:13:58.042"/>
-  </p1510:revLst>
-</p1510:revInfo>
-</file>
-
-<file path=ppt/changesInfos/changesInfo1.xml><?xml version="1.0" encoding="utf-8"?>
-<pc:chgInfo xmlns:a="http://schemas.openxmlformats.org/drawingml/2006/main" xmlns:r="http://schemas.openxmlformats.org/officeDocument/2006/relationships" xmlns:ac="http://schemas.microsoft.com/office/drawing/2013/main/command" xmlns:pc="http://schemas.microsoft.com/office/powerpoint/2013/main/command">
-  <pc:docChgLst>
-    <pc:chgData name="Jonathan Bollig" userId="8b5d0afe-f106-45e0-8c3f-fd98fa124db1" providerId="ADAL" clId="{B108959E-8160-4214-BA0D-42D2F1070C03}"/>
-    <pc:docChg chg="undo custSel addSld modSld sldOrd">
-      <pc:chgData name="Jonathan Bollig" userId="8b5d0afe-f106-45e0-8c3f-fd98fa124db1" providerId="ADAL" clId="{B108959E-8160-4214-BA0D-42D2F1070C03}" dt="2025-08-18T09:38:51.161" v="3588" actId="20577"/>
-      <pc:docMkLst>
-        <pc:docMk/>
-      </pc:docMkLst>
-      <pc:sldChg chg="modSp new mod">
-        <pc:chgData name="Jonathan Bollig" userId="8b5d0afe-f106-45e0-8c3f-fd98fa124db1" providerId="ADAL" clId="{B108959E-8160-4214-BA0D-42D2F1070C03}" dt="2025-08-17T16:47:18.038" v="2214" actId="790"/>
-        <pc:sldMkLst>
-          <pc:docMk/>
-          <pc:sldMk cId="836289018" sldId="256"/>
-        </pc:sldMkLst>
-      </pc:sldChg>
-      <pc:sldChg chg="modSp new mod">
-        <pc:chgData name="Jonathan Bollig" userId="8b5d0afe-f106-45e0-8c3f-fd98fa124db1" providerId="ADAL" clId="{B108959E-8160-4214-BA0D-42D2F1070C03}" dt="2025-08-17T16:47:18.038" v="2214" actId="790"/>
-        <pc:sldMkLst>
-          <pc:docMk/>
-          <pc:sldMk cId="3656329933" sldId="257"/>
-        </pc:sldMkLst>
-      </pc:sldChg>
-      <pc:sldChg chg="addSp delSp modSp new mod modNotesTx">
-        <pc:chgData name="Jonathan Bollig" userId="8b5d0afe-f106-45e0-8c3f-fd98fa124db1" providerId="ADAL" clId="{B108959E-8160-4214-BA0D-42D2F1070C03}" dt="2025-08-18T09:08:46.312" v="2773" actId="20577"/>
-        <pc:sldMkLst>
-          <pc:docMk/>
-          <pc:sldMk cId="544279955" sldId="258"/>
-        </pc:sldMkLst>
-      </pc:sldChg>
-      <pc:sldChg chg="addSp modSp new mod">
-        <pc:chgData name="Jonathan Bollig" userId="8b5d0afe-f106-45e0-8c3f-fd98fa124db1" providerId="ADAL" clId="{B108959E-8160-4214-BA0D-42D2F1070C03}" dt="2025-08-17T17:17:31.026" v="2605" actId="20577"/>
-        <pc:sldMkLst>
-          <pc:docMk/>
-          <pc:sldMk cId="2169503629" sldId="259"/>
-        </pc:sldMkLst>
-      </pc:sldChg>
-      <pc:sldChg chg="modSp new mod">
-        <pc:chgData name="Jonathan Bollig" userId="8b5d0afe-f106-45e0-8c3f-fd98fa124db1" providerId="ADAL" clId="{B108959E-8160-4214-BA0D-42D2F1070C03}" dt="2025-08-18T09:38:51.161" v="3588" actId="20577"/>
-        <pc:sldMkLst>
-          <pc:docMk/>
-          <pc:sldMk cId="2533283895" sldId="260"/>
-        </pc:sldMkLst>
-      </pc:sldChg>
-      <pc:sldChg chg="addSp delSp modSp new mod setBg">
-        <pc:chgData name="Jonathan Bollig" userId="8b5d0afe-f106-45e0-8c3f-fd98fa124db1" providerId="ADAL" clId="{B108959E-8160-4214-BA0D-42D2F1070C03}" dt="2025-08-17T17:07:09.185" v="2483" actId="5793"/>
-        <pc:sldMkLst>
-          <pc:docMk/>
-          <pc:sldMk cId="847849653" sldId="261"/>
-        </pc:sldMkLst>
-      </pc:sldChg>
-      <pc:sldChg chg="modSp new mod">
-        <pc:chgData name="Jonathan Bollig" userId="8b5d0afe-f106-45e0-8c3f-fd98fa124db1" providerId="ADAL" clId="{B108959E-8160-4214-BA0D-42D2F1070C03}" dt="2025-08-17T16:47:18.038" v="2214" actId="790"/>
-        <pc:sldMkLst>
-          <pc:docMk/>
-          <pc:sldMk cId="1908144578" sldId="262"/>
-        </pc:sldMkLst>
-      </pc:sldChg>
-      <pc:sldChg chg="modSp new mod">
-        <pc:chgData name="Jonathan Bollig" userId="8b5d0afe-f106-45e0-8c3f-fd98fa124db1" providerId="ADAL" clId="{B108959E-8160-4214-BA0D-42D2F1070C03}" dt="2025-08-17T16:47:18.038" v="2214" actId="790"/>
-        <pc:sldMkLst>
-          <pc:docMk/>
-          <pc:sldMk cId="4076698392" sldId="263"/>
-        </pc:sldMkLst>
-      </pc:sldChg>
-      <pc:sldChg chg="modSp new mod">
-        <pc:chgData name="Jonathan Bollig" userId="8b5d0afe-f106-45e0-8c3f-fd98fa124db1" providerId="ADAL" clId="{B108959E-8160-4214-BA0D-42D2F1070C03}" dt="2025-08-17T17:04:25.114" v="2368" actId="20577"/>
-        <pc:sldMkLst>
-          <pc:docMk/>
-          <pc:sldMk cId="3708449378" sldId="264"/>
-        </pc:sldMkLst>
-      </pc:sldChg>
-      <pc:sldChg chg="addSp delSp modSp new mod modNotesTx">
-        <pc:chgData name="Jonathan Bollig" userId="8b5d0afe-f106-45e0-8c3f-fd98fa124db1" providerId="ADAL" clId="{B108959E-8160-4214-BA0D-42D2F1070C03}" dt="2025-08-18T09:38:09.362" v="3531" actId="20577"/>
-        <pc:sldMkLst>
-          <pc:docMk/>
-          <pc:sldMk cId="933916611" sldId="265"/>
-        </pc:sldMkLst>
-      </pc:sldChg>
-      <pc:sldChg chg="modSp new mod ord">
-        <pc:chgData name="Jonathan Bollig" userId="8b5d0afe-f106-45e0-8c3f-fd98fa124db1" providerId="ADAL" clId="{B108959E-8160-4214-BA0D-42D2F1070C03}" dt="2025-08-18T09:21:09.777" v="2944" actId="20577"/>
-        <pc:sldMkLst>
-          <pc:docMk/>
-          <pc:sldMk cId="2117799034" sldId="266"/>
-        </pc:sldMkLst>
-      </pc:sldChg>
-    </pc:docChg>
-  </pc:docChgLst>
-  <pc:docChgLst>
-    <pc:chgData name="Jonathan Bollig" userId="8b5d0afe-f106-45e0-8c3f-fd98fa124db1" providerId="ADAL" clId="{B2469FA9-EBD8-4834-A16D-CBF8EFC907DD}"/>
-    <pc:docChg chg="undo redo custSel addSld delSld modSld sldOrd">
-      <pc:chgData name="Jonathan Bollig" userId="8b5d0afe-f106-45e0-8c3f-fd98fa124db1" providerId="ADAL" clId="{B2469FA9-EBD8-4834-A16D-CBF8EFC907DD}" dt="2025-10-04T14:10:20.296" v="2188" actId="20577"/>
-      <pc:docMkLst>
-        <pc:docMk/>
-      </pc:docMkLst>
-      <pc:sldChg chg="modSp mod">
-        <pc:chgData name="Jonathan Bollig" userId="8b5d0afe-f106-45e0-8c3f-fd98fa124db1" providerId="ADAL" clId="{B2469FA9-EBD8-4834-A16D-CBF8EFC907DD}" dt="2025-10-04T14:10:20.296" v="2188" actId="20577"/>
-        <pc:sldMkLst>
-          <pc:docMk/>
-          <pc:sldMk cId="836289018" sldId="256"/>
-        </pc:sldMkLst>
-        <pc:spChg chg="mod">
-          <ac:chgData name="Jonathan Bollig" userId="8b5d0afe-f106-45e0-8c3f-fd98fa124db1" providerId="ADAL" clId="{B2469FA9-EBD8-4834-A16D-CBF8EFC907DD}" dt="2025-10-04T14:10:20.296" v="2188" actId="20577"/>
-          <ac:spMkLst>
-            <pc:docMk/>
-            <pc:sldMk cId="836289018" sldId="256"/>
-            <ac:spMk id="2" creationId="{40F72F59-52B3-6063-A2E3-2AA45125A99B}"/>
-          </ac:spMkLst>
-        </pc:spChg>
-      </pc:sldChg>
-      <pc:sldChg chg="addSp modSp add del mod">
-        <pc:chgData name="Jonathan Bollig" userId="8b5d0afe-f106-45e0-8c3f-fd98fa124db1" providerId="ADAL" clId="{B2469FA9-EBD8-4834-A16D-CBF8EFC907DD}" dt="2025-10-01T11:29:17.058" v="1688" actId="47"/>
-        <pc:sldMkLst>
-          <pc:docMk/>
-          <pc:sldMk cId="2169503629" sldId="259"/>
-        </pc:sldMkLst>
-      </pc:sldChg>
-      <pc:sldChg chg="del">
-        <pc:chgData name="Jonathan Bollig" userId="8b5d0afe-f106-45e0-8c3f-fd98fa124db1" providerId="ADAL" clId="{B2469FA9-EBD8-4834-A16D-CBF8EFC907DD}" dt="2025-09-29T18:19:05.919" v="10" actId="47"/>
-        <pc:sldMkLst>
-          <pc:docMk/>
-          <pc:sldMk cId="932306145" sldId="260"/>
-        </pc:sldMkLst>
-      </pc:sldChg>
-      <pc:sldChg chg="addSp delSp modSp new mod ord">
-        <pc:chgData name="Jonathan Bollig" userId="8b5d0afe-f106-45e0-8c3f-fd98fa124db1" providerId="ADAL" clId="{B2469FA9-EBD8-4834-A16D-CBF8EFC907DD}" dt="2025-10-01T10:06:35.070" v="1288" actId="1076"/>
-        <pc:sldMkLst>
-          <pc:docMk/>
-          <pc:sldMk cId="3688806308" sldId="260"/>
-        </pc:sldMkLst>
-        <pc:spChg chg="mod">
-          <ac:chgData name="Jonathan Bollig" userId="8b5d0afe-f106-45e0-8c3f-fd98fa124db1" providerId="ADAL" clId="{B2469FA9-EBD8-4834-A16D-CBF8EFC907DD}" dt="2025-10-01T09:30:51.405" v="464" actId="20577"/>
-          <ac:spMkLst>
-            <pc:docMk/>
-            <pc:sldMk cId="3688806308" sldId="260"/>
-            <ac:spMk id="2" creationId="{D0D1FB0F-D18A-158A-433E-9941457A67D7}"/>
-          </ac:spMkLst>
-        </pc:spChg>
-        <pc:spChg chg="mod">
-          <ac:chgData name="Jonathan Bollig" userId="8b5d0afe-f106-45e0-8c3f-fd98fa124db1" providerId="ADAL" clId="{B2469FA9-EBD8-4834-A16D-CBF8EFC907DD}" dt="2025-10-01T09:56:06.733" v="1081" actId="20577"/>
-          <ac:spMkLst>
-            <pc:docMk/>
-            <pc:sldMk cId="3688806308" sldId="260"/>
-            <ac:spMk id="3" creationId="{024D3933-0938-0430-5545-608CD13E3063}"/>
-          </ac:spMkLst>
-        </pc:spChg>
-        <pc:spChg chg="add mod">
-          <ac:chgData name="Jonathan Bollig" userId="8b5d0afe-f106-45e0-8c3f-fd98fa124db1" providerId="ADAL" clId="{B2469FA9-EBD8-4834-A16D-CBF8EFC907DD}" dt="2025-10-01T09:55:55.118" v="1078" actId="1076"/>
-          <ac:spMkLst>
-            <pc:docMk/>
-            <pc:sldMk cId="3688806308" sldId="260"/>
-            <ac:spMk id="22" creationId="{2CE0CBA8-3BFC-6638-7E4F-F60C2DD121D8}"/>
-          </ac:spMkLst>
-        </pc:spChg>
-        <pc:picChg chg="add mod">
-          <ac:chgData name="Jonathan Bollig" userId="8b5d0afe-f106-45e0-8c3f-fd98fa124db1" providerId="ADAL" clId="{B2469FA9-EBD8-4834-A16D-CBF8EFC907DD}" dt="2025-10-01T09:37:25.555" v="546" actId="14100"/>
-          <ac:picMkLst>
-            <pc:docMk/>
-            <pc:sldMk cId="3688806308" sldId="260"/>
-            <ac:picMk id="16" creationId="{181F041E-6FF1-B1AE-FE95-125943F2E095}"/>
-          </ac:picMkLst>
-        </pc:picChg>
-        <pc:picChg chg="add mod">
-          <ac:chgData name="Jonathan Bollig" userId="8b5d0afe-f106-45e0-8c3f-fd98fa124db1" providerId="ADAL" clId="{B2469FA9-EBD8-4834-A16D-CBF8EFC907DD}" dt="2025-10-01T09:37:34.691" v="549" actId="14100"/>
-          <ac:picMkLst>
-            <pc:docMk/>
-            <pc:sldMk cId="3688806308" sldId="260"/>
-            <ac:picMk id="18" creationId="{E837DCEC-4AD9-0E19-8462-149CCE72E3D8}"/>
-          </ac:picMkLst>
-        </pc:picChg>
-        <pc:picChg chg="add mod">
-          <ac:chgData name="Jonathan Bollig" userId="8b5d0afe-f106-45e0-8c3f-fd98fa124db1" providerId="ADAL" clId="{B2469FA9-EBD8-4834-A16D-CBF8EFC907DD}" dt="2025-10-01T09:38:36.785" v="557" actId="1076"/>
-          <ac:picMkLst>
-            <pc:docMk/>
-            <pc:sldMk cId="3688806308" sldId="260"/>
-            <ac:picMk id="20" creationId="{600E70D4-181F-AE91-A2E0-A2A9DCD67963}"/>
-          </ac:picMkLst>
-        </pc:picChg>
-        <pc:picChg chg="add mod">
-          <ac:chgData name="Jonathan Bollig" userId="8b5d0afe-f106-45e0-8c3f-fd98fa124db1" providerId="ADAL" clId="{B2469FA9-EBD8-4834-A16D-CBF8EFC907DD}" dt="2025-10-01T10:06:35.070" v="1288" actId="1076"/>
-          <ac:picMkLst>
-            <pc:docMk/>
-            <pc:sldMk cId="3688806308" sldId="260"/>
-            <ac:picMk id="24" creationId="{4291CFD3-A80E-3B98-79F9-BBA67712A9E8}"/>
-          </ac:picMkLst>
-        </pc:picChg>
-        <pc:cxnChg chg="add mod">
-          <ac:chgData name="Jonathan Bollig" userId="8b5d0afe-f106-45e0-8c3f-fd98fa124db1" providerId="ADAL" clId="{B2469FA9-EBD8-4834-A16D-CBF8EFC907DD}" dt="2025-10-01T09:37:29.502" v="547" actId="1076"/>
-          <ac:cxnSpMkLst>
-            <pc:docMk/>
-            <pc:sldMk cId="3688806308" sldId="260"/>
-            <ac:cxnSpMk id="8" creationId="{9D4C2FB2-FD4E-0C0B-4894-278DD72108FA}"/>
-          </ac:cxnSpMkLst>
-        </pc:cxnChg>
-        <pc:cxnChg chg="add mod">
-          <ac:chgData name="Jonathan Bollig" userId="8b5d0afe-f106-45e0-8c3f-fd98fa124db1" providerId="ADAL" clId="{B2469FA9-EBD8-4834-A16D-CBF8EFC907DD}" dt="2025-10-01T09:37:42.834" v="553" actId="1076"/>
-          <ac:cxnSpMkLst>
-            <pc:docMk/>
-            <pc:sldMk cId="3688806308" sldId="260"/>
-            <ac:cxnSpMk id="9" creationId="{907874ED-0678-3B7C-BB71-D67F64173538}"/>
-          </ac:cxnSpMkLst>
-        </pc:cxnChg>
-        <pc:cxnChg chg="add mod">
-          <ac:chgData name="Jonathan Bollig" userId="8b5d0afe-f106-45e0-8c3f-fd98fa124db1" providerId="ADAL" clId="{B2469FA9-EBD8-4834-A16D-CBF8EFC907DD}" dt="2025-10-01T09:50:25.940" v="844" actId="1076"/>
-          <ac:cxnSpMkLst>
-            <pc:docMk/>
-            <pc:sldMk cId="3688806308" sldId="260"/>
-            <ac:cxnSpMk id="21" creationId="{B57CD40F-9870-3AF7-4129-2CEDC8A8832A}"/>
-          </ac:cxnSpMkLst>
-        </pc:cxnChg>
-        <pc:cxnChg chg="add mod">
-          <ac:chgData name="Jonathan Bollig" userId="8b5d0afe-f106-45e0-8c3f-fd98fa124db1" providerId="ADAL" clId="{B2469FA9-EBD8-4834-A16D-CBF8EFC907DD}" dt="2025-10-01T10:06:26.414" v="1286" actId="14100"/>
-          <ac:cxnSpMkLst>
-            <pc:docMk/>
-            <pc:sldMk cId="3688806308" sldId="260"/>
-            <ac:cxnSpMk id="25" creationId="{0430061A-3737-2F3A-7006-D04215062369}"/>
-          </ac:cxnSpMkLst>
-        </pc:cxnChg>
-      </pc:sldChg>
-      <pc:sldChg chg="addSp delSp modSp new mod">
-        <pc:chgData name="Jonathan Bollig" userId="8b5d0afe-f106-45e0-8c3f-fd98fa124db1" providerId="ADAL" clId="{B2469FA9-EBD8-4834-A16D-CBF8EFC907DD}" dt="2025-10-01T09:51:50.637" v="904" actId="20577"/>
-        <pc:sldMkLst>
-          <pc:docMk/>
-          <pc:sldMk cId="520036874" sldId="261"/>
-        </pc:sldMkLst>
-        <pc:spChg chg="mod">
-          <ac:chgData name="Jonathan Bollig" userId="8b5d0afe-f106-45e0-8c3f-fd98fa124db1" providerId="ADAL" clId="{B2469FA9-EBD8-4834-A16D-CBF8EFC907DD}" dt="2025-09-30T13:31:10.706" v="181" actId="20577"/>
-          <ac:spMkLst>
-            <pc:docMk/>
-            <pc:sldMk cId="520036874" sldId="261"/>
-            <ac:spMk id="2" creationId="{9028248B-28EC-D0D7-08F0-3B53F8B02E7C}"/>
-          </ac:spMkLst>
-        </pc:spChg>
-        <pc:spChg chg="mod">
-          <ac:chgData name="Jonathan Bollig" userId="8b5d0afe-f106-45e0-8c3f-fd98fa124db1" providerId="ADAL" clId="{B2469FA9-EBD8-4834-A16D-CBF8EFC907DD}" dt="2025-10-01T09:17:52.340" v="370" actId="20577"/>
-          <ac:spMkLst>
-            <pc:docMk/>
-            <pc:sldMk cId="520036874" sldId="261"/>
-            <ac:spMk id="3" creationId="{826F81B2-9632-97D8-A392-DF5E1C2C29A1}"/>
-          </ac:spMkLst>
-        </pc:spChg>
-        <pc:spChg chg="add mod">
-          <ac:chgData name="Jonathan Bollig" userId="8b5d0afe-f106-45e0-8c3f-fd98fa124db1" providerId="ADAL" clId="{B2469FA9-EBD8-4834-A16D-CBF8EFC907DD}" dt="2025-10-01T09:51:50.637" v="904" actId="20577"/>
-          <ac:spMkLst>
-            <pc:docMk/>
-            <pc:sldMk cId="520036874" sldId="261"/>
-            <ac:spMk id="4" creationId="{5AFE5F72-2F56-76DA-4404-9F45B1A2689F}"/>
-          </ac:spMkLst>
-        </pc:spChg>
-        <pc:spChg chg="add mod">
-          <ac:chgData name="Jonathan Bollig" userId="8b5d0afe-f106-45e0-8c3f-fd98fa124db1" providerId="ADAL" clId="{B2469FA9-EBD8-4834-A16D-CBF8EFC907DD}" dt="2025-10-01T09:15:46.819" v="276" actId="1076"/>
-          <ac:spMkLst>
-            <pc:docMk/>
-            <pc:sldMk cId="520036874" sldId="261"/>
-            <ac:spMk id="5" creationId="{CAE0AAB6-00DC-55D3-3F79-E0069797F27D}"/>
-          </ac:spMkLst>
-        </pc:spChg>
-        <pc:spChg chg="add mod">
-          <ac:chgData name="Jonathan Bollig" userId="8b5d0afe-f106-45e0-8c3f-fd98fa124db1" providerId="ADAL" clId="{B2469FA9-EBD8-4834-A16D-CBF8EFC907DD}" dt="2025-10-01T09:15:46.819" v="276" actId="1076"/>
-          <ac:spMkLst>
-            <pc:docMk/>
-            <pc:sldMk cId="520036874" sldId="261"/>
-            <ac:spMk id="6" creationId="{C73AEBFF-2C9A-C803-EC44-2817F4E6B980}"/>
-          </ac:spMkLst>
-        </pc:spChg>
-        <pc:spChg chg="add mod">
-          <ac:chgData name="Jonathan Bollig" userId="8b5d0afe-f106-45e0-8c3f-fd98fa124db1" providerId="ADAL" clId="{B2469FA9-EBD8-4834-A16D-CBF8EFC907DD}" dt="2025-10-01T09:15:46.819" v="276" actId="1076"/>
-          <ac:spMkLst>
-            <pc:docMk/>
-            <pc:sldMk cId="520036874" sldId="261"/>
-            <ac:spMk id="7" creationId="{581549CA-E309-F95D-ECE3-306DF3D368F2}"/>
-          </ac:spMkLst>
-        </pc:spChg>
-        <pc:spChg chg="add mod">
-          <ac:chgData name="Jonathan Bollig" userId="8b5d0afe-f106-45e0-8c3f-fd98fa124db1" providerId="ADAL" clId="{B2469FA9-EBD8-4834-A16D-CBF8EFC907DD}" dt="2025-10-01T09:17:20.344" v="302" actId="1076"/>
-          <ac:spMkLst>
-            <pc:docMk/>
-            <pc:sldMk cId="520036874" sldId="261"/>
-            <ac:spMk id="21" creationId="{953CCC95-FA7A-4B71-E981-73CF2F036F83}"/>
-          </ac:spMkLst>
-        </pc:spChg>
-        <pc:spChg chg="add mod">
-          <ac:chgData name="Jonathan Bollig" userId="8b5d0afe-f106-45e0-8c3f-fd98fa124db1" providerId="ADAL" clId="{B2469FA9-EBD8-4834-A16D-CBF8EFC907DD}" dt="2025-10-01T09:17:23.601" v="303" actId="1076"/>
-          <ac:spMkLst>
-            <pc:docMk/>
-            <pc:sldMk cId="520036874" sldId="261"/>
-            <ac:spMk id="23" creationId="{7D1E6E31-3B49-6350-FC33-7E6F8590D8FC}"/>
-          </ac:spMkLst>
-        </pc:spChg>
-        <pc:spChg chg="add mod">
-          <ac:chgData name="Jonathan Bollig" userId="8b5d0afe-f106-45e0-8c3f-fd98fa124db1" providerId="ADAL" clId="{B2469FA9-EBD8-4834-A16D-CBF8EFC907DD}" dt="2025-10-01T09:41:58.842" v="586" actId="1076"/>
-          <ac:spMkLst>
-            <pc:docMk/>
-            <pc:sldMk cId="520036874" sldId="261"/>
-            <ac:spMk id="26" creationId="{4B049117-E240-0C19-5590-9BED9B0BF43E}"/>
-          </ac:spMkLst>
-        </pc:spChg>
-        <pc:spChg chg="add mod">
-          <ac:chgData name="Jonathan Bollig" userId="8b5d0afe-f106-45e0-8c3f-fd98fa124db1" providerId="ADAL" clId="{B2469FA9-EBD8-4834-A16D-CBF8EFC907DD}" dt="2025-10-01T09:42:16.783" v="590" actId="14100"/>
-          <ac:spMkLst>
-            <pc:docMk/>
-            <pc:sldMk cId="520036874" sldId="261"/>
-            <ac:spMk id="27" creationId="{134167D6-D2FE-01AF-B753-C0FC4968D4E7}"/>
-          </ac:spMkLst>
-        </pc:spChg>
-        <pc:picChg chg="add mod">
-          <ac:chgData name="Jonathan Bollig" userId="8b5d0afe-f106-45e0-8c3f-fd98fa124db1" providerId="ADAL" clId="{B2469FA9-EBD8-4834-A16D-CBF8EFC907DD}" dt="2025-10-01T09:19:01.905" v="375" actId="1440"/>
-          <ac:picMkLst>
-            <pc:docMk/>
-            <pc:sldMk cId="520036874" sldId="261"/>
-            <ac:picMk id="25" creationId="{DFCB6EC6-58E9-F445-8D98-BFE79365B557}"/>
-          </ac:picMkLst>
-        </pc:picChg>
-        <pc:cxnChg chg="add mod">
-          <ac:chgData name="Jonathan Bollig" userId="8b5d0afe-f106-45e0-8c3f-fd98fa124db1" providerId="ADAL" clId="{B2469FA9-EBD8-4834-A16D-CBF8EFC907DD}" dt="2025-10-01T09:15:46.819" v="276" actId="1076"/>
-          <ac:cxnSpMkLst>
-            <pc:docMk/>
-            <pc:sldMk cId="520036874" sldId="261"/>
-            <ac:cxnSpMk id="8" creationId="{56D3C875-6DAA-15AA-C7BC-F3AF020E446C}"/>
-          </ac:cxnSpMkLst>
-        </pc:cxnChg>
-        <pc:cxnChg chg="add mod">
-          <ac:chgData name="Jonathan Bollig" userId="8b5d0afe-f106-45e0-8c3f-fd98fa124db1" providerId="ADAL" clId="{B2469FA9-EBD8-4834-A16D-CBF8EFC907DD}" dt="2025-10-01T09:15:46.819" v="276" actId="1076"/>
-          <ac:cxnSpMkLst>
-            <pc:docMk/>
-            <pc:sldMk cId="520036874" sldId="261"/>
-            <ac:cxnSpMk id="9" creationId="{586D1A88-E861-F787-851B-70E578EFE17B}"/>
-          </ac:cxnSpMkLst>
-        </pc:cxnChg>
-        <pc:cxnChg chg="add mod">
-          <ac:chgData name="Jonathan Bollig" userId="8b5d0afe-f106-45e0-8c3f-fd98fa124db1" providerId="ADAL" clId="{B2469FA9-EBD8-4834-A16D-CBF8EFC907DD}" dt="2025-10-01T09:15:46.819" v="276" actId="1076"/>
-          <ac:cxnSpMkLst>
-            <pc:docMk/>
-            <pc:sldMk cId="520036874" sldId="261"/>
-            <ac:cxnSpMk id="12" creationId="{5084D1DA-C198-AE32-CA29-9E2CF7F4C462}"/>
-          </ac:cxnSpMkLst>
-        </pc:cxnChg>
-        <pc:cxnChg chg="add mod">
-          <ac:chgData name="Jonathan Bollig" userId="8b5d0afe-f106-45e0-8c3f-fd98fa124db1" providerId="ADAL" clId="{B2469FA9-EBD8-4834-A16D-CBF8EFC907DD}" dt="2025-10-01T09:15:46.819" v="276" actId="1076"/>
-          <ac:cxnSpMkLst>
-            <pc:docMk/>
-            <pc:sldMk cId="520036874" sldId="261"/>
-            <ac:cxnSpMk id="14" creationId="{8D09E6C8-F52F-C289-8CDC-AC73E159A034}"/>
-          </ac:cxnSpMkLst>
-        </pc:cxnChg>
-      </pc:sldChg>
-      <pc:sldChg chg="addSp delSp modSp new mod">
-        <pc:chgData name="Jonathan Bollig" userId="8b5d0afe-f106-45e0-8c3f-fd98fa124db1" providerId="ADAL" clId="{B2469FA9-EBD8-4834-A16D-CBF8EFC907DD}" dt="2025-10-01T09:49:22.503" v="602" actId="1076"/>
-        <pc:sldMkLst>
-          <pc:docMk/>
-          <pc:sldMk cId="1868139474" sldId="262"/>
-        </pc:sldMkLst>
-        <pc:spChg chg="mod">
-          <ac:chgData name="Jonathan Bollig" userId="8b5d0afe-f106-45e0-8c3f-fd98fa124db1" providerId="ADAL" clId="{B2469FA9-EBD8-4834-A16D-CBF8EFC907DD}" dt="2025-10-01T09:41:05.769" v="579" actId="20577"/>
-          <ac:spMkLst>
-            <pc:docMk/>
-            <pc:sldMk cId="1868139474" sldId="262"/>
-            <ac:spMk id="2" creationId="{0CD211DA-5AE5-8544-FA52-36905B768F67}"/>
-          </ac:spMkLst>
-        </pc:spChg>
-        <pc:picChg chg="add mod ord">
-          <ac:chgData name="Jonathan Bollig" userId="8b5d0afe-f106-45e0-8c3f-fd98fa124db1" providerId="ADAL" clId="{B2469FA9-EBD8-4834-A16D-CBF8EFC907DD}" dt="2025-10-01T09:46:25.199" v="595" actId="1440"/>
-          <ac:picMkLst>
-            <pc:docMk/>
-            <pc:sldMk cId="1868139474" sldId="262"/>
-            <ac:picMk id="5" creationId="{3D3FCB0C-96C1-B6D2-CD82-53DA9DFF0731}"/>
-          </ac:picMkLst>
-        </pc:picChg>
-        <pc:picChg chg="add mod">
-          <ac:chgData name="Jonathan Bollig" userId="8b5d0afe-f106-45e0-8c3f-fd98fa124db1" providerId="ADAL" clId="{B2469FA9-EBD8-4834-A16D-CBF8EFC907DD}" dt="2025-10-01T09:46:25.199" v="595" actId="1440"/>
-          <ac:picMkLst>
-            <pc:docMk/>
-            <pc:sldMk cId="1868139474" sldId="262"/>
-            <ac:picMk id="7" creationId="{2F519CBF-C790-FCB6-6991-5FB69616454E}"/>
-          </ac:picMkLst>
-        </pc:picChg>
-        <pc:picChg chg="add mod">
-          <ac:chgData name="Jonathan Bollig" userId="8b5d0afe-f106-45e0-8c3f-fd98fa124db1" providerId="ADAL" clId="{B2469FA9-EBD8-4834-A16D-CBF8EFC907DD}" dt="2025-10-01T09:49:20.086" v="601" actId="1076"/>
-          <ac:picMkLst>
-            <pc:docMk/>
-            <pc:sldMk cId="1868139474" sldId="262"/>
-            <ac:picMk id="9" creationId="{B13DF91C-D35F-FBF3-67FA-3F0D5D45E8A1}"/>
-          </ac:picMkLst>
-        </pc:picChg>
-        <pc:picChg chg="add mod">
-          <ac:chgData name="Jonathan Bollig" userId="8b5d0afe-f106-45e0-8c3f-fd98fa124db1" providerId="ADAL" clId="{B2469FA9-EBD8-4834-A16D-CBF8EFC907DD}" dt="2025-10-01T09:49:22.503" v="602" actId="1076"/>
-          <ac:picMkLst>
-            <pc:docMk/>
-            <pc:sldMk cId="1868139474" sldId="262"/>
-            <ac:picMk id="11" creationId="{299BBBF6-F582-8F2B-F5D9-711E84D43628}"/>
-          </ac:picMkLst>
-        </pc:picChg>
-      </pc:sldChg>
-      <pc:sldChg chg="modSp new mod">
-        <pc:chgData name="Jonathan Bollig" userId="8b5d0afe-f106-45e0-8c3f-fd98fa124db1" providerId="ADAL" clId="{B2469FA9-EBD8-4834-A16D-CBF8EFC907DD}" dt="2025-10-02T19:21:05.013" v="1910" actId="20577"/>
-        <pc:sldMkLst>
-          <pc:docMk/>
-          <pc:sldMk cId="2756515142" sldId="263"/>
-        </pc:sldMkLst>
-        <pc:spChg chg="mod">
-          <ac:chgData name="Jonathan Bollig" userId="8b5d0afe-f106-45e0-8c3f-fd98fa124db1" providerId="ADAL" clId="{B2469FA9-EBD8-4834-A16D-CBF8EFC907DD}" dt="2025-10-01T09:51:08.129" v="895" actId="20577"/>
-          <ac:spMkLst>
-            <pc:docMk/>
-            <pc:sldMk cId="2756515142" sldId="263"/>
-            <ac:spMk id="2" creationId="{2A405DBC-3FC8-DC1F-6A32-40326E0AFC00}"/>
-          </ac:spMkLst>
-        </pc:spChg>
-        <pc:spChg chg="mod">
-          <ac:chgData name="Jonathan Bollig" userId="8b5d0afe-f106-45e0-8c3f-fd98fa124db1" providerId="ADAL" clId="{B2469FA9-EBD8-4834-A16D-CBF8EFC907DD}" dt="2025-10-02T19:21:05.013" v="1910" actId="20577"/>
-          <ac:spMkLst>
-            <pc:docMk/>
-            <pc:sldMk cId="2756515142" sldId="263"/>
-            <ac:spMk id="3" creationId="{58BD8C22-FC38-5571-E375-2A22F0C92EA7}"/>
-          </ac:spMkLst>
-        </pc:spChg>
-      </pc:sldChg>
-      <pc:sldChg chg="addSp delSp modSp new mod">
-        <pc:chgData name="Jonathan Bollig" userId="8b5d0afe-f106-45e0-8c3f-fd98fa124db1" providerId="ADAL" clId="{B2469FA9-EBD8-4834-A16D-CBF8EFC907DD}" dt="2025-10-01T11:08:01.738" v="1536" actId="20577"/>
-        <pc:sldMkLst>
-          <pc:docMk/>
-          <pc:sldMk cId="539501943" sldId="264"/>
-        </pc:sldMkLst>
-        <pc:spChg chg="mod">
-          <ac:chgData name="Jonathan Bollig" userId="8b5d0afe-f106-45e0-8c3f-fd98fa124db1" providerId="ADAL" clId="{B2469FA9-EBD8-4834-A16D-CBF8EFC907DD}" dt="2025-10-01T11:08:01.738" v="1536" actId="20577"/>
-          <ac:spMkLst>
-            <pc:docMk/>
-            <pc:sldMk cId="539501943" sldId="264"/>
-            <ac:spMk id="2" creationId="{0CF676AF-EC10-3FA7-A884-0DFE75F5BA29}"/>
-          </ac:spMkLst>
-        </pc:spChg>
-        <pc:spChg chg="add mod">
-          <ac:chgData name="Jonathan Bollig" userId="8b5d0afe-f106-45e0-8c3f-fd98fa124db1" providerId="ADAL" clId="{B2469FA9-EBD8-4834-A16D-CBF8EFC907DD}" dt="2025-10-01T10:19:50.409" v="1512" actId="1076"/>
-          <ac:spMkLst>
-            <pc:docMk/>
-            <pc:sldMk cId="539501943" sldId="264"/>
-            <ac:spMk id="4" creationId="{4FCF54D6-4A6D-35CE-6FC9-39D50CE85FF2}"/>
-          </ac:spMkLst>
-        </pc:spChg>
-        <pc:spChg chg="add mod">
-          <ac:chgData name="Jonathan Bollig" userId="8b5d0afe-f106-45e0-8c3f-fd98fa124db1" providerId="ADAL" clId="{B2469FA9-EBD8-4834-A16D-CBF8EFC907DD}" dt="2025-10-01T10:19:50.409" v="1512" actId="1076"/>
-          <ac:spMkLst>
-            <pc:docMk/>
-            <pc:sldMk cId="539501943" sldId="264"/>
-            <ac:spMk id="5" creationId="{0F270356-AFF2-A7FA-15E6-E6C505BCC5C9}"/>
-          </ac:spMkLst>
-        </pc:spChg>
-        <pc:spChg chg="add mod">
-          <ac:chgData name="Jonathan Bollig" userId="8b5d0afe-f106-45e0-8c3f-fd98fa124db1" providerId="ADAL" clId="{B2469FA9-EBD8-4834-A16D-CBF8EFC907DD}" dt="2025-10-01T10:19:50.409" v="1512" actId="1076"/>
-          <ac:spMkLst>
-            <pc:docMk/>
-            <pc:sldMk cId="539501943" sldId="264"/>
-            <ac:spMk id="6" creationId="{80648EA6-2644-D128-38C0-3C28778A272B}"/>
-          </ac:spMkLst>
-        </pc:spChg>
-        <pc:spChg chg="add mod">
-          <ac:chgData name="Jonathan Bollig" userId="8b5d0afe-f106-45e0-8c3f-fd98fa124db1" providerId="ADAL" clId="{B2469FA9-EBD8-4834-A16D-CBF8EFC907DD}" dt="2025-10-01T10:19:50.409" v="1512" actId="1076"/>
-          <ac:spMkLst>
-            <pc:docMk/>
-            <pc:sldMk cId="539501943" sldId="264"/>
-            <ac:spMk id="7" creationId="{7D63D7FB-DAFA-DF99-F517-9119FC1AC9C0}"/>
-          </ac:spMkLst>
-        </pc:spChg>
-        <pc:spChg chg="add mod">
-          <ac:chgData name="Jonathan Bollig" userId="8b5d0afe-f106-45e0-8c3f-fd98fa124db1" providerId="ADAL" clId="{B2469FA9-EBD8-4834-A16D-CBF8EFC907DD}" dt="2025-10-01T10:19:50.409" v="1512" actId="1076"/>
-          <ac:spMkLst>
-            <pc:docMk/>
-            <pc:sldMk cId="539501943" sldId="264"/>
-            <ac:spMk id="12" creationId="{0F4CBEE2-754A-BF38-DB4B-DC6A6F16BD1E}"/>
-          </ac:spMkLst>
-        </pc:spChg>
-        <pc:spChg chg="add mod ord">
-          <ac:chgData name="Jonathan Bollig" userId="8b5d0afe-f106-45e0-8c3f-fd98fa124db1" providerId="ADAL" clId="{B2469FA9-EBD8-4834-A16D-CBF8EFC907DD}" dt="2025-10-01T10:19:50.409" v="1512" actId="1076"/>
-          <ac:spMkLst>
-            <pc:docMk/>
-            <pc:sldMk cId="539501943" sldId="264"/>
-            <ac:spMk id="13" creationId="{6C12A045-772B-0FBE-AC43-41C8BBD9E99B}"/>
-          </ac:spMkLst>
-        </pc:spChg>
-        <pc:spChg chg="add mod">
-          <ac:chgData name="Jonathan Bollig" userId="8b5d0afe-f106-45e0-8c3f-fd98fa124db1" providerId="ADAL" clId="{B2469FA9-EBD8-4834-A16D-CBF8EFC907DD}" dt="2025-10-01T10:19:50.409" v="1512" actId="1076"/>
-          <ac:spMkLst>
-            <pc:docMk/>
-            <pc:sldMk cId="539501943" sldId="264"/>
-            <ac:spMk id="16" creationId="{F1DBB668-4150-1DE3-13CE-53CC70D585A6}"/>
-          </ac:spMkLst>
-        </pc:spChg>
-        <pc:spChg chg="add mod">
-          <ac:chgData name="Jonathan Bollig" userId="8b5d0afe-f106-45e0-8c3f-fd98fa124db1" providerId="ADAL" clId="{B2469FA9-EBD8-4834-A16D-CBF8EFC907DD}" dt="2025-10-01T10:19:56.388" v="1513" actId="1076"/>
-          <ac:spMkLst>
-            <pc:docMk/>
-            <pc:sldMk cId="539501943" sldId="264"/>
-            <ac:spMk id="37" creationId="{E63E1191-2AD7-F354-BD40-5C33059EB9DE}"/>
-          </ac:spMkLst>
-        </pc:spChg>
-        <pc:spChg chg="add mod">
-          <ac:chgData name="Jonathan Bollig" userId="8b5d0afe-f106-45e0-8c3f-fd98fa124db1" providerId="ADAL" clId="{B2469FA9-EBD8-4834-A16D-CBF8EFC907DD}" dt="2025-10-01T10:19:56.388" v="1513" actId="1076"/>
-          <ac:spMkLst>
-            <pc:docMk/>
-            <pc:sldMk cId="539501943" sldId="264"/>
-            <ac:spMk id="38" creationId="{9F45DB8C-28F2-F23D-79DC-3A8BA3E30F61}"/>
-          </ac:spMkLst>
-        </pc:spChg>
-        <pc:spChg chg="add mod">
-          <ac:chgData name="Jonathan Bollig" userId="8b5d0afe-f106-45e0-8c3f-fd98fa124db1" providerId="ADAL" clId="{B2469FA9-EBD8-4834-A16D-CBF8EFC907DD}" dt="2025-10-01T10:19:56.388" v="1513" actId="1076"/>
-          <ac:spMkLst>
-            <pc:docMk/>
-            <pc:sldMk cId="539501943" sldId="264"/>
-            <ac:spMk id="39" creationId="{CCCAAA7C-4625-CAE3-40BE-A672B37E9FDF}"/>
-          </ac:spMkLst>
-        </pc:spChg>
-        <pc:spChg chg="add mod">
-          <ac:chgData name="Jonathan Bollig" userId="8b5d0afe-f106-45e0-8c3f-fd98fa124db1" providerId="ADAL" clId="{B2469FA9-EBD8-4834-A16D-CBF8EFC907DD}" dt="2025-10-01T10:19:56.388" v="1513" actId="1076"/>
-          <ac:spMkLst>
-            <pc:docMk/>
-            <pc:sldMk cId="539501943" sldId="264"/>
-            <ac:spMk id="40" creationId="{E868DF51-CBF5-34F3-2FB6-F47074E84AB7}"/>
-          </ac:spMkLst>
-        </pc:spChg>
-        <pc:spChg chg="add mod">
-          <ac:chgData name="Jonathan Bollig" userId="8b5d0afe-f106-45e0-8c3f-fd98fa124db1" providerId="ADAL" clId="{B2469FA9-EBD8-4834-A16D-CBF8EFC907DD}" dt="2025-10-01T10:19:56.388" v="1513" actId="1076"/>
-          <ac:spMkLst>
-            <pc:docMk/>
-            <pc:sldMk cId="539501943" sldId="264"/>
-            <ac:spMk id="45" creationId="{4F2C637F-8D54-8E10-2820-74622DED5FB7}"/>
-          </ac:spMkLst>
-        </pc:spChg>
-        <pc:spChg chg="add mod">
-          <ac:chgData name="Jonathan Bollig" userId="8b5d0afe-f106-45e0-8c3f-fd98fa124db1" providerId="ADAL" clId="{B2469FA9-EBD8-4834-A16D-CBF8EFC907DD}" dt="2025-10-01T10:19:56.388" v="1513" actId="1076"/>
-          <ac:spMkLst>
-            <pc:docMk/>
-            <pc:sldMk cId="539501943" sldId="264"/>
-            <ac:spMk id="46" creationId="{6CD50F20-C952-4A74-1884-F8CADA83CF0E}"/>
-          </ac:spMkLst>
-        </pc:spChg>
-        <pc:cxnChg chg="add mod">
-          <ac:chgData name="Jonathan Bollig" userId="8b5d0afe-f106-45e0-8c3f-fd98fa124db1" providerId="ADAL" clId="{B2469FA9-EBD8-4834-A16D-CBF8EFC907DD}" dt="2025-10-01T10:19:50.409" v="1512" actId="1076"/>
-          <ac:cxnSpMkLst>
-            <pc:docMk/>
-            <pc:sldMk cId="539501943" sldId="264"/>
-            <ac:cxnSpMk id="8" creationId="{7D51FF47-5803-1C53-B721-A38D4DC64796}"/>
-          </ac:cxnSpMkLst>
-        </pc:cxnChg>
-        <pc:cxnChg chg="add mod">
-          <ac:chgData name="Jonathan Bollig" userId="8b5d0afe-f106-45e0-8c3f-fd98fa124db1" providerId="ADAL" clId="{B2469FA9-EBD8-4834-A16D-CBF8EFC907DD}" dt="2025-10-01T10:19:50.409" v="1512" actId="1076"/>
-          <ac:cxnSpMkLst>
-            <pc:docMk/>
-            <pc:sldMk cId="539501943" sldId="264"/>
-            <ac:cxnSpMk id="9" creationId="{B01B5AF8-366F-AAA8-9789-3F8776559E7B}"/>
-          </ac:cxnSpMkLst>
-        </pc:cxnChg>
-        <pc:cxnChg chg="add mod">
-          <ac:chgData name="Jonathan Bollig" userId="8b5d0afe-f106-45e0-8c3f-fd98fa124db1" providerId="ADAL" clId="{B2469FA9-EBD8-4834-A16D-CBF8EFC907DD}" dt="2025-10-01T10:19:10.395" v="1507" actId="1076"/>
-          <ac:cxnSpMkLst>
-            <pc:docMk/>
-            <pc:sldMk cId="539501943" sldId="264"/>
-            <ac:cxnSpMk id="11" creationId="{FCEE2C36-EE25-7320-061B-B70BBD04A72F}"/>
-          </ac:cxnSpMkLst>
-        </pc:cxnChg>
-        <pc:cxnChg chg="add mod">
-          <ac:chgData name="Jonathan Bollig" userId="8b5d0afe-f106-45e0-8c3f-fd98fa124db1" providerId="ADAL" clId="{B2469FA9-EBD8-4834-A16D-CBF8EFC907DD}" dt="2025-10-01T10:17:49.741" v="1493" actId="14100"/>
-          <ac:cxnSpMkLst>
-            <pc:docMk/>
-            <pc:sldMk cId="539501943" sldId="264"/>
-            <ac:cxnSpMk id="14" creationId="{A2C90197-45DD-988D-728C-EB6B040A52DF}"/>
-          </ac:cxnSpMkLst>
-        </pc:cxnChg>
-        <pc:cxnChg chg="add mod">
-          <ac:chgData name="Jonathan Bollig" userId="8b5d0afe-f106-45e0-8c3f-fd98fa124db1" providerId="ADAL" clId="{B2469FA9-EBD8-4834-A16D-CBF8EFC907DD}" dt="2025-10-01T10:19:50.409" v="1512" actId="1076"/>
-          <ac:cxnSpMkLst>
-            <pc:docMk/>
-            <pc:sldMk cId="539501943" sldId="264"/>
-            <ac:cxnSpMk id="15" creationId="{41564787-C89B-6E46-E4B4-4056A16D65AD}"/>
-          </ac:cxnSpMkLst>
-        </pc:cxnChg>
-        <pc:cxnChg chg="add mod">
-          <ac:chgData name="Jonathan Bollig" userId="8b5d0afe-f106-45e0-8c3f-fd98fa124db1" providerId="ADAL" clId="{B2469FA9-EBD8-4834-A16D-CBF8EFC907DD}" dt="2025-10-01T10:19:56.388" v="1513" actId="1076"/>
-          <ac:cxnSpMkLst>
-            <pc:docMk/>
-            <pc:sldMk cId="539501943" sldId="264"/>
-            <ac:cxnSpMk id="41" creationId="{FB304E74-A35A-56C0-5511-04E8A32B2F48}"/>
-          </ac:cxnSpMkLst>
-        </pc:cxnChg>
-        <pc:cxnChg chg="add mod">
-          <ac:chgData name="Jonathan Bollig" userId="8b5d0afe-f106-45e0-8c3f-fd98fa124db1" providerId="ADAL" clId="{B2469FA9-EBD8-4834-A16D-CBF8EFC907DD}" dt="2025-10-01T10:19:56.388" v="1513" actId="1076"/>
-          <ac:cxnSpMkLst>
-            <pc:docMk/>
-            <pc:sldMk cId="539501943" sldId="264"/>
-            <ac:cxnSpMk id="42" creationId="{7789AECA-1B6E-32DA-D5C3-2BDB774E9336}"/>
-          </ac:cxnSpMkLst>
-        </pc:cxnChg>
-        <pc:cxnChg chg="add mod">
-          <ac:chgData name="Jonathan Bollig" userId="8b5d0afe-f106-45e0-8c3f-fd98fa124db1" providerId="ADAL" clId="{B2469FA9-EBD8-4834-A16D-CBF8EFC907DD}" dt="2025-10-01T10:19:56.388" v="1513" actId="1076"/>
-          <ac:cxnSpMkLst>
-            <pc:docMk/>
-            <pc:sldMk cId="539501943" sldId="264"/>
-            <ac:cxnSpMk id="43" creationId="{4A3E2242-7152-1103-701F-279C6B56229B}"/>
-          </ac:cxnSpMkLst>
-        </pc:cxnChg>
-        <pc:cxnChg chg="add mod">
-          <ac:chgData name="Jonathan Bollig" userId="8b5d0afe-f106-45e0-8c3f-fd98fa124db1" providerId="ADAL" clId="{B2469FA9-EBD8-4834-A16D-CBF8EFC907DD}" dt="2025-10-01T10:19:56.388" v="1513" actId="1076"/>
-          <ac:cxnSpMkLst>
-            <pc:docMk/>
-            <pc:sldMk cId="539501943" sldId="264"/>
-            <ac:cxnSpMk id="44" creationId="{B4F791B1-C516-74C1-410C-AC2A6EDD00E7}"/>
-          </ac:cxnSpMkLst>
-        </pc:cxnChg>
-        <pc:cxnChg chg="add mod">
-          <ac:chgData name="Jonathan Bollig" userId="8b5d0afe-f106-45e0-8c3f-fd98fa124db1" providerId="ADAL" clId="{B2469FA9-EBD8-4834-A16D-CBF8EFC907DD}" dt="2025-10-01T10:19:59.539" v="1514" actId="1076"/>
-          <ac:cxnSpMkLst>
-            <pc:docMk/>
-            <pc:sldMk cId="539501943" sldId="264"/>
-            <ac:cxnSpMk id="47" creationId="{878F0329-DA31-B64A-7ACE-0E9198050F7B}"/>
-          </ac:cxnSpMkLst>
-        </pc:cxnChg>
-      </pc:sldChg>
-      <pc:sldChg chg="addSp delSp modSp add mod">
-        <pc:chgData name="Jonathan Bollig" userId="8b5d0afe-f106-45e0-8c3f-fd98fa124db1" providerId="ADAL" clId="{B2469FA9-EBD8-4834-A16D-CBF8EFC907DD}" dt="2025-10-01T11:25:59.536" v="1681" actId="1076"/>
-        <pc:sldMkLst>
-          <pc:docMk/>
-          <pc:sldMk cId="3053755417" sldId="265"/>
-        </pc:sldMkLst>
-        <pc:spChg chg="mod">
-          <ac:chgData name="Jonathan Bollig" userId="8b5d0afe-f106-45e0-8c3f-fd98fa124db1" providerId="ADAL" clId="{B2469FA9-EBD8-4834-A16D-CBF8EFC907DD}" dt="2025-10-01T10:23:00.625" v="1534" actId="20577"/>
-          <ac:spMkLst>
-            <pc:docMk/>
-            <pc:sldMk cId="3053755417" sldId="265"/>
-            <ac:spMk id="2" creationId="{9DDD8079-83A5-6AE4-4C9F-D31598C5AB52}"/>
-          </ac:spMkLst>
-        </pc:spChg>
-        <pc:spChg chg="add mod">
-          <ac:chgData name="Jonathan Bollig" userId="8b5d0afe-f106-45e0-8c3f-fd98fa124db1" providerId="ADAL" clId="{B2469FA9-EBD8-4834-A16D-CBF8EFC907DD}" dt="2025-10-01T10:22:16.006" v="1530" actId="1076"/>
-          <ac:spMkLst>
-            <pc:docMk/>
-            <pc:sldMk cId="3053755417" sldId="265"/>
-            <ac:spMk id="18" creationId="{DCD0A207-5F7B-FB6F-5AC6-5A74120618D5}"/>
-          </ac:spMkLst>
-        </pc:spChg>
-        <pc:picChg chg="add mod">
-          <ac:chgData name="Jonathan Bollig" userId="8b5d0afe-f106-45e0-8c3f-fd98fa124db1" providerId="ADAL" clId="{B2469FA9-EBD8-4834-A16D-CBF8EFC907DD}" dt="2025-10-01T10:22:18.651" v="1531" actId="1076"/>
-          <ac:picMkLst>
-            <pc:docMk/>
-            <pc:sldMk cId="3053755417" sldId="265"/>
-            <ac:picMk id="10" creationId="{88450583-1220-5AFE-1D44-C3D3E22FC65D}"/>
-          </ac:picMkLst>
-        </pc:picChg>
-        <pc:picChg chg="add mod">
-          <ac:chgData name="Jonathan Bollig" userId="8b5d0afe-f106-45e0-8c3f-fd98fa124db1" providerId="ADAL" clId="{B2469FA9-EBD8-4834-A16D-CBF8EFC907DD}" dt="2025-10-01T10:22:20.987" v="1532" actId="1076"/>
-          <ac:picMkLst>
-            <pc:docMk/>
-            <pc:sldMk cId="3053755417" sldId="265"/>
-            <ac:picMk id="17" creationId="{DE90956A-A18D-1EDF-8E4F-FF70447A1601}"/>
-          </ac:picMkLst>
-        </pc:picChg>
-        <pc:cxnChg chg="add mod">
-          <ac:chgData name="Jonathan Bollig" userId="8b5d0afe-f106-45e0-8c3f-fd98fa124db1" providerId="ADAL" clId="{B2469FA9-EBD8-4834-A16D-CBF8EFC907DD}" dt="2025-10-01T11:25:59.536" v="1681" actId="1076"/>
-          <ac:cxnSpMkLst>
-            <pc:docMk/>
-            <pc:sldMk cId="3053755417" sldId="265"/>
-            <ac:cxnSpMk id="19" creationId="{5442D70E-3788-3BF6-1FAB-CBA0FF183A60}"/>
-          </ac:cxnSpMkLst>
-        </pc:cxnChg>
-      </pc:sldChg>
-      <pc:sldChg chg="addSp delSp modSp new mod">
-        <pc:chgData name="Jonathan Bollig" userId="8b5d0afe-f106-45e0-8c3f-fd98fa124db1" providerId="ADAL" clId="{B2469FA9-EBD8-4834-A16D-CBF8EFC907DD}" dt="2025-10-01T11:26:56.798" v="1687" actId="1440"/>
-        <pc:sldMkLst>
-          <pc:docMk/>
-          <pc:sldMk cId="780551519" sldId="266"/>
-        </pc:sldMkLst>
-        <pc:spChg chg="mod">
-          <ac:chgData name="Jonathan Bollig" userId="8b5d0afe-f106-45e0-8c3f-fd98fa124db1" providerId="ADAL" clId="{B2469FA9-EBD8-4834-A16D-CBF8EFC907DD}" dt="2025-10-01T11:10:32.719" v="1581" actId="20577"/>
-          <ac:spMkLst>
-            <pc:docMk/>
-            <pc:sldMk cId="780551519" sldId="266"/>
-            <ac:spMk id="2" creationId="{CAA2A131-3D5F-B53A-637B-0FE361536048}"/>
-          </ac:spMkLst>
-        </pc:spChg>
-        <pc:spChg chg="mod">
-          <ac:chgData name="Jonathan Bollig" userId="8b5d0afe-f106-45e0-8c3f-fd98fa124db1" providerId="ADAL" clId="{B2469FA9-EBD8-4834-A16D-CBF8EFC907DD}" dt="2025-10-01T11:14:16.138" v="1663" actId="20577"/>
-          <ac:spMkLst>
-            <pc:docMk/>
-            <pc:sldMk cId="780551519" sldId="266"/>
-            <ac:spMk id="3" creationId="{1C981356-4300-F30D-5FB5-B79CD9DF668A}"/>
-          </ac:spMkLst>
-        </pc:spChg>
-        <pc:spChg chg="add mod">
-          <ac:chgData name="Jonathan Bollig" userId="8b5d0afe-f106-45e0-8c3f-fd98fa124db1" providerId="ADAL" clId="{B2469FA9-EBD8-4834-A16D-CBF8EFC907DD}" dt="2025-10-01T11:10:04.019" v="1572" actId="1076"/>
-          <ac:spMkLst>
-            <pc:docMk/>
-            <pc:sldMk cId="780551519" sldId="266"/>
-            <ac:spMk id="4" creationId="{90A9734A-041C-1683-12C9-F748C8C671CD}"/>
-          </ac:spMkLst>
-        </pc:spChg>
-        <pc:spChg chg="add mod">
-          <ac:chgData name="Jonathan Bollig" userId="8b5d0afe-f106-45e0-8c3f-fd98fa124db1" providerId="ADAL" clId="{B2469FA9-EBD8-4834-A16D-CBF8EFC907DD}" dt="2025-10-01T11:10:23.775" v="1578" actId="1076"/>
-          <ac:spMkLst>
-            <pc:docMk/>
-            <pc:sldMk cId="780551519" sldId="266"/>
-            <ac:spMk id="5" creationId="{C095A216-14D3-6062-EB62-DA0C662DB063}"/>
-          </ac:spMkLst>
-        </pc:spChg>
-        <pc:spChg chg="add mod">
-          <ac:chgData name="Jonathan Bollig" userId="8b5d0afe-f106-45e0-8c3f-fd98fa124db1" providerId="ADAL" clId="{B2469FA9-EBD8-4834-A16D-CBF8EFC907DD}" dt="2025-10-01T11:10:04.019" v="1572" actId="1076"/>
-          <ac:spMkLst>
-            <pc:docMk/>
-            <pc:sldMk cId="780551519" sldId="266"/>
-            <ac:spMk id="6" creationId="{06D71163-0005-B86F-C260-0A6C49385B75}"/>
-          </ac:spMkLst>
-        </pc:spChg>
-        <pc:spChg chg="add mod">
-          <ac:chgData name="Jonathan Bollig" userId="8b5d0afe-f106-45e0-8c3f-fd98fa124db1" providerId="ADAL" clId="{B2469FA9-EBD8-4834-A16D-CBF8EFC907DD}" dt="2025-10-01T11:09:49.214" v="1570" actId="1076"/>
-          <ac:spMkLst>
-            <pc:docMk/>
-            <pc:sldMk cId="780551519" sldId="266"/>
-            <ac:spMk id="7" creationId="{247834CC-FDA6-7B4A-3612-833C45BCD036}"/>
-          </ac:spMkLst>
-        </pc:spChg>
-        <pc:spChg chg="add mod">
-          <ac:chgData name="Jonathan Bollig" userId="8b5d0afe-f106-45e0-8c3f-fd98fa124db1" providerId="ADAL" clId="{B2469FA9-EBD8-4834-A16D-CBF8EFC907DD}" dt="2025-10-01T11:10:21.333" v="1577" actId="1076"/>
-          <ac:spMkLst>
-            <pc:docMk/>
-            <pc:sldMk cId="780551519" sldId="266"/>
-            <ac:spMk id="11" creationId="{D141A4AF-6618-7189-5D99-6171BAAC9C66}"/>
-          </ac:spMkLst>
-        </pc:spChg>
-        <pc:spChg chg="add mod">
-          <ac:chgData name="Jonathan Bollig" userId="8b5d0afe-f106-45e0-8c3f-fd98fa124db1" providerId="ADAL" clId="{B2469FA9-EBD8-4834-A16D-CBF8EFC907DD}" dt="2025-10-01T11:13:16.908" v="1623" actId="1076"/>
-          <ac:spMkLst>
-            <pc:docMk/>
-            <pc:sldMk cId="780551519" sldId="266"/>
-            <ac:spMk id="14" creationId="{708CFE90-35EE-19DD-93CE-F196FFC76787}"/>
-          </ac:spMkLst>
-        </pc:spChg>
-        <pc:spChg chg="add mod">
-          <ac:chgData name="Jonathan Bollig" userId="8b5d0afe-f106-45e0-8c3f-fd98fa124db1" providerId="ADAL" clId="{B2469FA9-EBD8-4834-A16D-CBF8EFC907DD}" dt="2025-10-01T11:10:11.813" v="1574" actId="1076"/>
-          <ac:spMkLst>
-            <pc:docMk/>
-            <pc:sldMk cId="780551519" sldId="266"/>
-            <ac:spMk id="15" creationId="{CF233378-915A-7A43-2734-BB11EA7ED13B}"/>
-          </ac:spMkLst>
-        </pc:spChg>
-        <pc:spChg chg="add mod">
-          <ac:chgData name="Jonathan Bollig" userId="8b5d0afe-f106-45e0-8c3f-fd98fa124db1" providerId="ADAL" clId="{B2469FA9-EBD8-4834-A16D-CBF8EFC907DD}" dt="2025-10-01T11:13:43.423" v="1630" actId="1076"/>
-          <ac:spMkLst>
-            <pc:docMk/>
-            <pc:sldMk cId="780551519" sldId="266"/>
-            <ac:spMk id="16" creationId="{36FC0339-D113-E767-FF1D-87639716EA92}"/>
-          </ac:spMkLst>
-        </pc:spChg>
-        <pc:spChg chg="add mod ord">
-          <ac:chgData name="Jonathan Bollig" userId="8b5d0afe-f106-45e0-8c3f-fd98fa124db1" providerId="ADAL" clId="{B2469FA9-EBD8-4834-A16D-CBF8EFC907DD}" dt="2025-10-01T11:13:23.054" v="1624" actId="1076"/>
-          <ac:spMkLst>
-            <pc:docMk/>
-            <pc:sldMk cId="780551519" sldId="266"/>
-            <ac:spMk id="23" creationId="{10C44C1D-A77E-EB5D-FA78-7AD1279FBD46}"/>
-          </ac:spMkLst>
-        </pc:spChg>
-        <pc:spChg chg="add mod ord">
-          <ac:chgData name="Jonathan Bollig" userId="8b5d0afe-f106-45e0-8c3f-fd98fa124db1" providerId="ADAL" clId="{B2469FA9-EBD8-4834-A16D-CBF8EFC907DD}" dt="2025-10-01T11:13:39.960" v="1629" actId="166"/>
-          <ac:spMkLst>
-            <pc:docMk/>
-            <pc:sldMk cId="780551519" sldId="266"/>
-            <ac:spMk id="24" creationId="{FCEACBE0-49E0-48F5-6208-E92E77719D2E}"/>
-          </ac:spMkLst>
-        </pc:spChg>
-        <pc:spChg chg="add mod">
-          <ac:chgData name="Jonathan Bollig" userId="8b5d0afe-f106-45e0-8c3f-fd98fa124db1" providerId="ADAL" clId="{B2469FA9-EBD8-4834-A16D-CBF8EFC907DD}" dt="2025-10-01T11:14:27.865" v="1665" actId="1076"/>
-          <ac:spMkLst>
-            <pc:docMk/>
-            <pc:sldMk cId="780551519" sldId="266"/>
-            <ac:spMk id="43" creationId="{4ABDBB82-753C-2B48-0EE3-C1CF10B7A758}"/>
-          </ac:spMkLst>
-        </pc:spChg>
-        <pc:picChg chg="add mod">
-          <ac:chgData name="Jonathan Bollig" userId="8b5d0afe-f106-45e0-8c3f-fd98fa124db1" providerId="ADAL" clId="{B2469FA9-EBD8-4834-A16D-CBF8EFC907DD}" dt="2025-10-01T11:25:35.899" v="1675" actId="1440"/>
-          <ac:picMkLst>
-            <pc:docMk/>
-            <pc:sldMk cId="780551519" sldId="266"/>
-            <ac:picMk id="47" creationId="{62EBB821-222E-B602-4B17-A92E125CCCB4}"/>
-          </ac:picMkLst>
-        </pc:picChg>
-        <pc:picChg chg="add mod">
-          <ac:chgData name="Jonathan Bollig" userId="8b5d0afe-f106-45e0-8c3f-fd98fa124db1" providerId="ADAL" clId="{B2469FA9-EBD8-4834-A16D-CBF8EFC907DD}" dt="2025-10-01T11:26:56.798" v="1687" actId="1440"/>
-          <ac:picMkLst>
-            <pc:docMk/>
-            <pc:sldMk cId="780551519" sldId="266"/>
-            <ac:picMk id="51" creationId="{BC94C026-43A9-B909-E784-1410A0D23CCA}"/>
-          </ac:picMkLst>
-        </pc:picChg>
-        <pc:cxnChg chg="add mod">
-          <ac:chgData name="Jonathan Bollig" userId="8b5d0afe-f106-45e0-8c3f-fd98fa124db1" providerId="ADAL" clId="{B2469FA9-EBD8-4834-A16D-CBF8EFC907DD}" dt="2025-10-01T11:10:23.775" v="1578" actId="1076"/>
-          <ac:cxnSpMkLst>
-            <pc:docMk/>
-            <pc:sldMk cId="780551519" sldId="266"/>
-            <ac:cxnSpMk id="8" creationId="{61EC9600-7173-23F8-3047-0FE0D728EF8E}"/>
-          </ac:cxnSpMkLst>
-        </pc:cxnChg>
-        <pc:cxnChg chg="mod">
-          <ac:chgData name="Jonathan Bollig" userId="8b5d0afe-f106-45e0-8c3f-fd98fa124db1" providerId="ADAL" clId="{B2469FA9-EBD8-4834-A16D-CBF8EFC907DD}" dt="2025-10-01T11:10:04.019" v="1572" actId="1076"/>
-          <ac:cxnSpMkLst>
-            <pc:docMk/>
-            <pc:sldMk cId="780551519" sldId="266"/>
-            <ac:cxnSpMk id="9" creationId="{C285A213-28B2-1E28-B031-0160DEEF12DB}"/>
-          </ac:cxnSpMkLst>
-        </pc:cxnChg>
-        <pc:cxnChg chg="add mod">
-          <ac:chgData name="Jonathan Bollig" userId="8b5d0afe-f106-45e0-8c3f-fd98fa124db1" providerId="ADAL" clId="{B2469FA9-EBD8-4834-A16D-CBF8EFC907DD}" dt="2025-10-01T11:10:23.775" v="1578" actId="1076"/>
-          <ac:cxnSpMkLst>
-            <pc:docMk/>
-            <pc:sldMk cId="780551519" sldId="266"/>
-            <ac:cxnSpMk id="10" creationId="{A06D2880-BBE2-9FCD-5B50-318643344231}"/>
-          </ac:cxnSpMkLst>
-        </pc:cxnChg>
-        <pc:cxnChg chg="mod">
-          <ac:chgData name="Jonathan Bollig" userId="8b5d0afe-f106-45e0-8c3f-fd98fa124db1" providerId="ADAL" clId="{B2469FA9-EBD8-4834-A16D-CBF8EFC907DD}" dt="2025-10-01T11:13:16.908" v="1623" actId="1076"/>
-          <ac:cxnSpMkLst>
-            <pc:docMk/>
-            <pc:sldMk cId="780551519" sldId="266"/>
-            <ac:cxnSpMk id="12" creationId="{C2BB2D9A-4347-E619-5358-51D5E94D4F75}"/>
-          </ac:cxnSpMkLst>
-        </pc:cxnChg>
-        <pc:cxnChg chg="add mod">
-          <ac:chgData name="Jonathan Bollig" userId="8b5d0afe-f106-45e0-8c3f-fd98fa124db1" providerId="ADAL" clId="{B2469FA9-EBD8-4834-A16D-CBF8EFC907DD}" dt="2025-10-01T11:13:43.423" v="1630" actId="1076"/>
-          <ac:cxnSpMkLst>
-            <pc:docMk/>
-            <pc:sldMk cId="780551519" sldId="266"/>
-            <ac:cxnSpMk id="27" creationId="{7C41E648-20A8-5D9C-E12C-15F6A4B4ED0D}"/>
-          </ac:cxnSpMkLst>
-        </pc:cxnChg>
-        <pc:cxnChg chg="add mod">
-          <ac:chgData name="Jonathan Bollig" userId="8b5d0afe-f106-45e0-8c3f-fd98fa124db1" providerId="ADAL" clId="{B2469FA9-EBD8-4834-A16D-CBF8EFC907DD}" dt="2025-10-01T11:13:35.833" v="1628" actId="14100"/>
-          <ac:cxnSpMkLst>
-            <pc:docMk/>
-            <pc:sldMk cId="780551519" sldId="266"/>
-            <ac:cxnSpMk id="36" creationId="{7039E967-804F-C4D1-F15F-BE9002FD8885}"/>
-          </ac:cxnSpMkLst>
-        </pc:cxnChg>
-        <pc:cxnChg chg="add mod">
-          <ac:chgData name="Jonathan Bollig" userId="8b5d0afe-f106-45e0-8c3f-fd98fa124db1" providerId="ADAL" clId="{B2469FA9-EBD8-4834-A16D-CBF8EFC907DD}" dt="2025-10-01T11:13:55.395" v="1634" actId="14100"/>
-          <ac:cxnSpMkLst>
-            <pc:docMk/>
-            <pc:sldMk cId="780551519" sldId="266"/>
-            <ac:cxnSpMk id="40" creationId="{F35BEB33-CF18-9346-FCF2-B7D69029F53A}"/>
-          </ac:cxnSpMkLst>
-        </pc:cxnChg>
-        <pc:cxnChg chg="add mod">
-          <ac:chgData name="Jonathan Bollig" userId="8b5d0afe-f106-45e0-8c3f-fd98fa124db1" providerId="ADAL" clId="{B2469FA9-EBD8-4834-A16D-CBF8EFC907DD}" dt="2025-10-01T11:25:54.197" v="1679" actId="1076"/>
-          <ac:cxnSpMkLst>
-            <pc:docMk/>
-            <pc:sldMk cId="780551519" sldId="266"/>
-            <ac:cxnSpMk id="48" creationId="{77D68CDA-5D84-98F2-C813-8EBF801D5B14}"/>
-          </ac:cxnSpMkLst>
-        </pc:cxnChg>
-      </pc:sldChg>
-      <pc:sldChg chg="addSp delSp modSp new mod">
-        <pc:chgData name="Jonathan Bollig" userId="8b5d0afe-f106-45e0-8c3f-fd98fa124db1" providerId="ADAL" clId="{B2469FA9-EBD8-4834-A16D-CBF8EFC907DD}" dt="2025-10-04T12:14:02.954" v="2186" actId="1076"/>
-        <pc:sldMkLst>
-          <pc:docMk/>
-          <pc:sldMk cId="2138807736" sldId="267"/>
-        </pc:sldMkLst>
-        <pc:spChg chg="mod">
-          <ac:chgData name="Jonathan Bollig" userId="8b5d0afe-f106-45e0-8c3f-fd98fa124db1" providerId="ADAL" clId="{B2469FA9-EBD8-4834-A16D-CBF8EFC907DD}" dt="2025-10-04T12:13:08.567" v="2177" actId="1076"/>
-          <ac:spMkLst>
-            <pc:docMk/>
-            <pc:sldMk cId="2138807736" sldId="267"/>
-            <ac:spMk id="2" creationId="{4264A0F1-7BC6-1BD9-7CBF-4AC55674DB61}"/>
-          </ac:spMkLst>
-        </pc:spChg>
-        <pc:spChg chg="add mod">
-          <ac:chgData name="Jonathan Bollig" userId="8b5d0afe-f106-45e0-8c3f-fd98fa124db1" providerId="ADAL" clId="{B2469FA9-EBD8-4834-A16D-CBF8EFC907DD}" dt="2025-10-04T12:14:02.954" v="2186" actId="1076"/>
-          <ac:spMkLst>
-            <pc:docMk/>
-            <pc:sldMk cId="2138807736" sldId="267"/>
-            <ac:spMk id="5" creationId="{CFD53965-A01B-3775-EFA6-74691911BBA6}"/>
-          </ac:spMkLst>
-        </pc:spChg>
-        <pc:picChg chg="add mod">
-          <ac:chgData name="Jonathan Bollig" userId="8b5d0afe-f106-45e0-8c3f-fd98fa124db1" providerId="ADAL" clId="{B2469FA9-EBD8-4834-A16D-CBF8EFC907DD}" dt="2025-10-04T12:13:29.864" v="2183" actId="1076"/>
-          <ac:picMkLst>
-            <pc:docMk/>
-            <pc:sldMk cId="2138807736" sldId="267"/>
-            <ac:picMk id="4" creationId="{BE94D407-8A89-EF37-7EA5-9D49827137D1}"/>
-          </ac:picMkLst>
-        </pc:picChg>
-      </pc:sldChg>
-      <pc:sldChg chg="addSp modSp new mod">
-        <pc:chgData name="Jonathan Bollig" userId="8b5d0afe-f106-45e0-8c3f-fd98fa124db1" providerId="ADAL" clId="{B2469FA9-EBD8-4834-A16D-CBF8EFC907DD}" dt="2025-10-01T21:33:21.798" v="1907" actId="20577"/>
-        <pc:sldMkLst>
-          <pc:docMk/>
-          <pc:sldMk cId="1546763463" sldId="268"/>
-        </pc:sldMkLst>
-        <pc:spChg chg="mod">
-          <ac:chgData name="Jonathan Bollig" userId="8b5d0afe-f106-45e0-8c3f-fd98fa124db1" providerId="ADAL" clId="{B2469FA9-EBD8-4834-A16D-CBF8EFC907DD}" dt="2025-10-01T21:33:21.798" v="1907" actId="20577"/>
-          <ac:spMkLst>
-            <pc:docMk/>
-            <pc:sldMk cId="1546763463" sldId="268"/>
-            <ac:spMk id="2" creationId="{433F1E3F-124A-19CA-C429-6C3856D4C0B9}"/>
-          </ac:spMkLst>
-        </pc:spChg>
-        <pc:spChg chg="mod">
-          <ac:chgData name="Jonathan Bollig" userId="8b5d0afe-f106-45e0-8c3f-fd98fa124db1" providerId="ADAL" clId="{B2469FA9-EBD8-4834-A16D-CBF8EFC907DD}" dt="2025-10-01T15:29:13.808" v="1890" actId="20577"/>
-          <ac:spMkLst>
-            <pc:docMk/>
-            <pc:sldMk cId="1546763463" sldId="268"/>
-            <ac:spMk id="3" creationId="{25F4BBB3-B404-08F6-32BB-5090BF49665F}"/>
-          </ac:spMkLst>
-        </pc:spChg>
-        <pc:picChg chg="add mod">
-          <ac:chgData name="Jonathan Bollig" userId="8b5d0afe-f106-45e0-8c3f-fd98fa124db1" providerId="ADAL" clId="{B2469FA9-EBD8-4834-A16D-CBF8EFC907DD}" dt="2025-10-01T15:30:51.166" v="1900" actId="1440"/>
-          <ac:picMkLst>
-            <pc:docMk/>
-            <pc:sldMk cId="1546763463" sldId="268"/>
-            <ac:picMk id="5" creationId="{5CE2ACFD-7D51-0182-7D03-FCAB3AE577FD}"/>
-          </ac:picMkLst>
-        </pc:picChg>
-        <pc:picChg chg="add mod">
-          <ac:chgData name="Jonathan Bollig" userId="8b5d0afe-f106-45e0-8c3f-fd98fa124db1" providerId="ADAL" clId="{B2469FA9-EBD8-4834-A16D-CBF8EFC907DD}" dt="2025-10-01T15:30:51.166" v="1900" actId="1440"/>
-          <ac:picMkLst>
-            <pc:docMk/>
-            <pc:sldMk cId="1546763463" sldId="268"/>
-            <ac:picMk id="8" creationId="{259566A3-A612-A44C-2BB4-3409CD852DDF}"/>
-          </ac:picMkLst>
-        </pc:picChg>
-        <pc:cxnChg chg="add mod">
-          <ac:chgData name="Jonathan Bollig" userId="8b5d0afe-f106-45e0-8c3f-fd98fa124db1" providerId="ADAL" clId="{B2469FA9-EBD8-4834-A16D-CBF8EFC907DD}" dt="2025-10-01T15:30:20.251" v="1896" actId="1076"/>
-          <ac:cxnSpMkLst>
-            <pc:docMk/>
-            <pc:sldMk cId="1546763463" sldId="268"/>
-            <ac:cxnSpMk id="6" creationId="{3C513106-C3DA-CCEB-A11A-492B19B8B661}"/>
-          </ac:cxnSpMkLst>
-        </pc:cxnChg>
-      </pc:sldChg>
-      <pc:sldChg chg="addSp modSp new mod modNotesTx">
-        <pc:chgData name="Jonathan Bollig" userId="8b5d0afe-f106-45e0-8c3f-fd98fa124db1" providerId="ADAL" clId="{B2469FA9-EBD8-4834-A16D-CBF8EFC907DD}" dt="2025-10-03T23:15:27.827" v="2176" actId="14100"/>
-        <pc:sldMkLst>
-          <pc:docMk/>
-          <pc:sldMk cId="3852162179" sldId="269"/>
-        </pc:sldMkLst>
-        <pc:spChg chg="mod">
-          <ac:chgData name="Jonathan Bollig" userId="8b5d0afe-f106-45e0-8c3f-fd98fa124db1" providerId="ADAL" clId="{B2469FA9-EBD8-4834-A16D-CBF8EFC907DD}" dt="2025-10-03T23:12:55.046" v="1937" actId="20577"/>
-          <ac:spMkLst>
-            <pc:docMk/>
-            <pc:sldMk cId="3852162179" sldId="269"/>
-            <ac:spMk id="2" creationId="{37B93B2D-6818-961E-D582-616267CB6FAE}"/>
-          </ac:spMkLst>
-        </pc:spChg>
-        <pc:spChg chg="add mod">
-          <ac:chgData name="Jonathan Bollig" userId="8b5d0afe-f106-45e0-8c3f-fd98fa124db1" providerId="ADAL" clId="{B2469FA9-EBD8-4834-A16D-CBF8EFC907DD}" dt="2025-10-03T23:15:13.441" v="2169" actId="14100"/>
-          <ac:spMkLst>
-            <pc:docMk/>
-            <pc:sldMk cId="3852162179" sldId="269"/>
-            <ac:spMk id="6" creationId="{B3720FC7-1D98-7743-6C0A-4CBB4DF1A709}"/>
-          </ac:spMkLst>
-        </pc:spChg>
-        <pc:spChg chg="add mod">
-          <ac:chgData name="Jonathan Bollig" userId="8b5d0afe-f106-45e0-8c3f-fd98fa124db1" providerId="ADAL" clId="{B2469FA9-EBD8-4834-A16D-CBF8EFC907DD}" dt="2025-10-03T23:15:27.827" v="2176" actId="14100"/>
-          <ac:spMkLst>
-            <pc:docMk/>
-            <pc:sldMk cId="3852162179" sldId="269"/>
-            <ac:spMk id="7" creationId="{F2A72F19-85FC-4C4F-A15E-CD0153E287F4}"/>
-          </ac:spMkLst>
-        </pc:spChg>
-        <pc:picChg chg="add mod">
-          <ac:chgData name="Jonathan Bollig" userId="8b5d0afe-f106-45e0-8c3f-fd98fa124db1" providerId="ADAL" clId="{B2469FA9-EBD8-4834-A16D-CBF8EFC907DD}" dt="2025-10-03T23:15:18.307" v="2172" actId="1076"/>
-          <ac:picMkLst>
-            <pc:docMk/>
-            <pc:sldMk cId="3852162179" sldId="269"/>
-            <ac:picMk id="5" creationId="{CD78AD2C-3D0E-CC15-5BF3-25BD85C3D6CE}"/>
-          </ac:picMkLst>
-        </pc:picChg>
-      </pc:sldChg>
-    </pc:docChg>
-  </pc:docChgLst>
-  <pc:docChgLst>
-    <pc:chgData name="Jonathan Bollig" userId="8b5d0afe-f106-45e0-8c3f-fd98fa124db1" providerId="ADAL" clId="{891409C9-2319-433B-8001-2E1CE368518E}"/>
-    <pc:docChg chg="custSel addSld delSld modSld">
-      <pc:chgData name="Jonathan Bollig" userId="8b5d0afe-f106-45e0-8c3f-fd98fa124db1" providerId="ADAL" clId="{891409C9-2319-433B-8001-2E1CE368518E}" dt="2025-08-18T13:33:56.347" v="46" actId="47"/>
-      <pc:docMkLst>
-        <pc:docMk/>
-      </pc:docMkLst>
-      <pc:sldChg chg="modSp mod">
-        <pc:chgData name="Jonathan Bollig" userId="8b5d0afe-f106-45e0-8c3f-fd98fa124db1" providerId="ADAL" clId="{891409C9-2319-433B-8001-2E1CE368518E}" dt="2025-08-18T10:03:07.320" v="7" actId="20577"/>
-        <pc:sldMkLst>
-          <pc:docMk/>
-          <pc:sldMk cId="836289018" sldId="256"/>
-        </pc:sldMkLst>
-      </pc:sldChg>
-      <pc:sldChg chg="del">
-        <pc:chgData name="Jonathan Bollig" userId="8b5d0afe-f106-45e0-8c3f-fd98fa124db1" providerId="ADAL" clId="{891409C9-2319-433B-8001-2E1CE368518E}" dt="2025-08-18T09:57:07.527" v="0" actId="47"/>
-        <pc:sldMkLst>
-          <pc:docMk/>
-          <pc:sldMk cId="3656329933" sldId="257"/>
-        </pc:sldMkLst>
-      </pc:sldChg>
-      <pc:sldChg chg="del">
-        <pc:chgData name="Jonathan Bollig" userId="8b5d0afe-f106-45e0-8c3f-fd98fa124db1" providerId="ADAL" clId="{891409C9-2319-433B-8001-2E1CE368518E}" dt="2025-08-18T09:57:07.527" v="0" actId="47"/>
-        <pc:sldMkLst>
-          <pc:docMk/>
-          <pc:sldMk cId="544279955" sldId="258"/>
-        </pc:sldMkLst>
-      </pc:sldChg>
-      <pc:sldChg chg="delSp modSp del mod">
-        <pc:chgData name="Jonathan Bollig" userId="8b5d0afe-f106-45e0-8c3f-fd98fa124db1" providerId="ADAL" clId="{891409C9-2319-433B-8001-2E1CE368518E}" dt="2025-08-18T13:33:56.347" v="46" actId="47"/>
-        <pc:sldMkLst>
-          <pc:docMk/>
-          <pc:sldMk cId="2169503629" sldId="259"/>
-        </pc:sldMkLst>
-      </pc:sldChg>
-      <pc:sldChg chg="add">
-        <pc:chgData name="Jonathan Bollig" userId="8b5d0afe-f106-45e0-8c3f-fd98fa124db1" providerId="ADAL" clId="{891409C9-2319-433B-8001-2E1CE368518E}" dt="2025-08-18T13:33:54.473" v="45"/>
-        <pc:sldMkLst>
-          <pc:docMk/>
-          <pc:sldMk cId="932306145" sldId="260"/>
-        </pc:sldMkLst>
-      </pc:sldChg>
-      <pc:sldChg chg="del">
-        <pc:chgData name="Jonathan Bollig" userId="8b5d0afe-f106-45e0-8c3f-fd98fa124db1" providerId="ADAL" clId="{891409C9-2319-433B-8001-2E1CE368518E}" dt="2025-08-18T09:57:07.527" v="0" actId="47"/>
-        <pc:sldMkLst>
-          <pc:docMk/>
-          <pc:sldMk cId="2533283895" sldId="260"/>
-        </pc:sldMkLst>
-      </pc:sldChg>
-      <pc:sldChg chg="del">
-        <pc:chgData name="Jonathan Bollig" userId="8b5d0afe-f106-45e0-8c3f-fd98fa124db1" providerId="ADAL" clId="{891409C9-2319-433B-8001-2E1CE368518E}" dt="2025-08-18T09:57:07.527" v="0" actId="47"/>
-        <pc:sldMkLst>
-          <pc:docMk/>
-          <pc:sldMk cId="847849653" sldId="261"/>
-        </pc:sldMkLst>
-      </pc:sldChg>
-      <pc:sldChg chg="del">
-        <pc:chgData name="Jonathan Bollig" userId="8b5d0afe-f106-45e0-8c3f-fd98fa124db1" providerId="ADAL" clId="{891409C9-2319-433B-8001-2E1CE368518E}" dt="2025-08-18T09:57:07.527" v="0" actId="47"/>
-        <pc:sldMkLst>
-          <pc:docMk/>
-          <pc:sldMk cId="1908144578" sldId="262"/>
-        </pc:sldMkLst>
-      </pc:sldChg>
-      <pc:sldChg chg="del">
-        <pc:chgData name="Jonathan Bollig" userId="8b5d0afe-f106-45e0-8c3f-fd98fa124db1" providerId="ADAL" clId="{891409C9-2319-433B-8001-2E1CE368518E}" dt="2025-08-18T09:57:07.527" v="0" actId="47"/>
-        <pc:sldMkLst>
-          <pc:docMk/>
-          <pc:sldMk cId="4076698392" sldId="263"/>
-        </pc:sldMkLst>
-      </pc:sldChg>
-      <pc:sldChg chg="del">
-        <pc:chgData name="Jonathan Bollig" userId="8b5d0afe-f106-45e0-8c3f-fd98fa124db1" providerId="ADAL" clId="{891409C9-2319-433B-8001-2E1CE368518E}" dt="2025-08-18T09:57:07.527" v="0" actId="47"/>
-        <pc:sldMkLst>
-          <pc:docMk/>
-          <pc:sldMk cId="3708449378" sldId="264"/>
-        </pc:sldMkLst>
-      </pc:sldChg>
-      <pc:sldChg chg="del">
-        <pc:chgData name="Jonathan Bollig" userId="8b5d0afe-f106-45e0-8c3f-fd98fa124db1" providerId="ADAL" clId="{891409C9-2319-433B-8001-2E1CE368518E}" dt="2025-08-18T09:57:07.527" v="0" actId="47"/>
-        <pc:sldMkLst>
-          <pc:docMk/>
-          <pc:sldMk cId="933916611" sldId="265"/>
-        </pc:sldMkLst>
-      </pc:sldChg>
-      <pc:sldChg chg="del">
-        <pc:chgData name="Jonathan Bollig" userId="8b5d0afe-f106-45e0-8c3f-fd98fa124db1" providerId="ADAL" clId="{891409C9-2319-433B-8001-2E1CE368518E}" dt="2025-08-18T09:57:07.527" v="0" actId="47"/>
-        <pc:sldMkLst>
-          <pc:docMk/>
-          <pc:sldMk cId="2117799034" sldId="266"/>
-        </pc:sldMkLst>
-      </pc:sldChg>
-    </pc:docChg>
-  </pc:docChgLst>
-</pc:chgInfo>
-</file>
-
 <file path=ppt/notesMasters/notesMaster1.xml><?xml version="1.0" encoding="utf-8"?>
 <p:notesMaster xmlns:a="http://schemas.openxmlformats.org/drawingml/2006/main" xmlns:r="http://schemas.openxmlformats.org/officeDocument/2006/relationships" xmlns:p="http://schemas.openxmlformats.org/presentationml/2006/main">
   <p:cSld>
@@ -1283,7 +207,7 @@
           <a:p>
             <a:fld id="{0B6CA2EE-5589-4682-AD7F-744DBF1E81F5}" type="datetimeFigureOut">
               <a:rPr lang="de-DE" smtClean="0"/>
-              <a:t>04.10.2025</a:t>
+              <a:t>07.10.2025</a:t>
             </a:fld>
             <a:endParaRPr lang="de-DE"/>
           </a:p>
@@ -1441,7 +365,7 @@
           <a:p>
             <a:fld id="{11422C3B-6429-4381-8F08-B422F3CD22BF}" type="slidenum">
               <a:rPr lang="de-DE" smtClean="0"/>
-              <a:t>‹Nr.›</a:t>
+              <a:t>‹#›</a:t>
             </a:fld>
             <a:endParaRPr lang="de-DE"/>
           </a:p>
@@ -1736,6 +660,90 @@
 </p:notes>
 </file>
 
+<file path=ppt/notesSlides/notesSlide3.xml><?xml version="1.0" encoding="utf-8"?>
+<p:notes xmlns:a="http://schemas.openxmlformats.org/drawingml/2006/main" xmlns:r="http://schemas.openxmlformats.org/officeDocument/2006/relationships" xmlns:p="http://schemas.openxmlformats.org/presentationml/2006/main">
+  <p:cSld>
+    <p:spTree>
+      <p:nvGrpSpPr>
+        <p:cNvPr id="1" name=""/>
+        <p:cNvGrpSpPr/>
+        <p:nvPr/>
+      </p:nvGrpSpPr>
+      <p:grpSpPr>
+        <a:xfrm>
+          <a:off x="0" y="0"/>
+          <a:ext cx="0" cy="0"/>
+          <a:chOff x="0" y="0"/>
+          <a:chExt cx="0" cy="0"/>
+        </a:xfrm>
+      </p:grpSpPr>
+      <p:sp>
+        <p:nvSpPr>
+          <p:cNvPr id="2" name="Slide Image Placeholder 1"/>
+          <p:cNvSpPr>
+            <a:spLocks noGrp="1" noRot="1" noChangeAspect="1"/>
+          </p:cNvSpPr>
+          <p:nvPr>
+            <p:ph type="sldImg"/>
+          </p:nvPr>
+        </p:nvSpPr>
+        <p:spPr/>
+      </p:sp>
+      <p:sp>
+        <p:nvSpPr>
+          <p:cNvPr id="3" name="Notes Placeholder 2"/>
+          <p:cNvSpPr>
+            <a:spLocks noGrp="1"/>
+          </p:cNvSpPr>
+          <p:nvPr>
+            <p:ph type="body" idx="1"/>
+          </p:nvPr>
+        </p:nvSpPr>
+        <p:spPr/>
+        <p:txBody>
+          <a:bodyPr/>
+          <a:lstStyle/>
+          <a:p>
+            <a:endParaRPr lang="de-DE" dirty="0"/>
+          </a:p>
+        </p:txBody>
+      </p:sp>
+      <p:sp>
+        <p:nvSpPr>
+          <p:cNvPr id="4" name="Slide Number Placeholder 3"/>
+          <p:cNvSpPr>
+            <a:spLocks noGrp="1"/>
+          </p:cNvSpPr>
+          <p:nvPr>
+            <p:ph type="sldNum" sz="quarter" idx="5"/>
+          </p:nvPr>
+        </p:nvSpPr>
+        <p:spPr/>
+        <p:txBody>
+          <a:bodyPr/>
+          <a:lstStyle/>
+          <a:p>
+            <a:fld id="{11422C3B-6429-4381-8F08-B422F3CD22BF}" type="slidenum">
+              <a:rPr lang="de-DE" smtClean="0"/>
+              <a:t>7</a:t>
+            </a:fld>
+            <a:endParaRPr lang="de-DE"/>
+          </a:p>
+        </p:txBody>
+      </p:sp>
+    </p:spTree>
+    <p:extLst>
+      <p:ext uri="{BB962C8B-B14F-4D97-AF65-F5344CB8AC3E}">
+        <p14:creationId xmlns:p14="http://schemas.microsoft.com/office/powerpoint/2010/main" val="4175287144"/>
+      </p:ext>
+    </p:extLst>
+  </p:cSld>
+  <p:clrMapOvr>
+    <a:masterClrMapping/>
+  </p:clrMapOvr>
+</p:notes>
+</file>
+
 <file path=ppt/slideLayouts/slideLayout1.xml><?xml version="1.0" encoding="utf-8"?>
 <p:sldLayout xmlns:a="http://schemas.openxmlformats.org/drawingml/2006/main" xmlns:r="http://schemas.openxmlformats.org/officeDocument/2006/relationships" xmlns:p="http://schemas.openxmlformats.org/presentationml/2006/main" type="title" preserve="1">
   <p:cSld name="Titelfolie">
@@ -1883,7 +891,7 @@
           <a:p>
             <a:fld id="{ADA51F25-4808-47F4-BF6E-BCDC230DB01C}" type="datetimeFigureOut">
               <a:rPr lang="de-DE" smtClean="0"/>
-              <a:t>04.10.2025</a:t>
+              <a:t>07.10.2025</a:t>
             </a:fld>
             <a:endParaRPr lang="de-DE"/>
           </a:p>
@@ -1937,7 +945,7 @@
           <a:p>
             <a:fld id="{C018A060-D51C-4243-8F88-61D66D5570B8}" type="slidenum">
               <a:rPr lang="de-DE" smtClean="0"/>
-              <a:t>‹Nr.›</a:t>
+              <a:t>‹#›</a:t>
             </a:fld>
             <a:endParaRPr lang="de-DE"/>
           </a:p>
@@ -2081,7 +1089,7 @@
           <a:p>
             <a:fld id="{ADA51F25-4808-47F4-BF6E-BCDC230DB01C}" type="datetimeFigureOut">
               <a:rPr lang="de-DE" smtClean="0"/>
-              <a:t>04.10.2025</a:t>
+              <a:t>07.10.2025</a:t>
             </a:fld>
             <a:endParaRPr lang="de-DE"/>
           </a:p>
@@ -2135,7 +1143,7 @@
           <a:p>
             <a:fld id="{C018A060-D51C-4243-8F88-61D66D5570B8}" type="slidenum">
               <a:rPr lang="de-DE" smtClean="0"/>
-              <a:t>‹Nr.›</a:t>
+              <a:t>‹#›</a:t>
             </a:fld>
             <a:endParaRPr lang="de-DE"/>
           </a:p>
@@ -2289,7 +1297,7 @@
           <a:p>
             <a:fld id="{ADA51F25-4808-47F4-BF6E-BCDC230DB01C}" type="datetimeFigureOut">
               <a:rPr lang="de-DE" smtClean="0"/>
-              <a:t>04.10.2025</a:t>
+              <a:t>07.10.2025</a:t>
             </a:fld>
             <a:endParaRPr lang="de-DE"/>
           </a:p>
@@ -2343,7 +1351,7 @@
           <a:p>
             <a:fld id="{C018A060-D51C-4243-8F88-61D66D5570B8}" type="slidenum">
               <a:rPr lang="de-DE" smtClean="0"/>
-              <a:t>‹Nr.›</a:t>
+              <a:t>‹#›</a:t>
             </a:fld>
             <a:endParaRPr lang="de-DE"/>
           </a:p>
@@ -2487,7 +1495,7 @@
           <a:p>
             <a:fld id="{ADA51F25-4808-47F4-BF6E-BCDC230DB01C}" type="datetimeFigureOut">
               <a:rPr lang="de-DE" smtClean="0"/>
-              <a:t>04.10.2025</a:t>
+              <a:t>07.10.2025</a:t>
             </a:fld>
             <a:endParaRPr lang="de-DE"/>
           </a:p>
@@ -2541,7 +1549,7 @@
           <a:p>
             <a:fld id="{C018A060-D51C-4243-8F88-61D66D5570B8}" type="slidenum">
               <a:rPr lang="de-DE" smtClean="0"/>
-              <a:t>‹Nr.›</a:t>
+              <a:t>‹#›</a:t>
             </a:fld>
             <a:endParaRPr lang="de-DE"/>
           </a:p>
@@ -2762,7 +1770,7 @@
           <a:p>
             <a:fld id="{ADA51F25-4808-47F4-BF6E-BCDC230DB01C}" type="datetimeFigureOut">
               <a:rPr lang="de-DE" smtClean="0"/>
-              <a:t>04.10.2025</a:t>
+              <a:t>07.10.2025</a:t>
             </a:fld>
             <a:endParaRPr lang="de-DE"/>
           </a:p>
@@ -2816,7 +1824,7 @@
           <a:p>
             <a:fld id="{C018A060-D51C-4243-8F88-61D66D5570B8}" type="slidenum">
               <a:rPr lang="de-DE" smtClean="0"/>
-              <a:t>‹Nr.›</a:t>
+              <a:t>‹#›</a:t>
             </a:fld>
             <a:endParaRPr lang="de-DE"/>
           </a:p>
@@ -3027,7 +2035,7 @@
           <a:p>
             <a:fld id="{ADA51F25-4808-47F4-BF6E-BCDC230DB01C}" type="datetimeFigureOut">
               <a:rPr lang="de-DE" smtClean="0"/>
-              <a:t>04.10.2025</a:t>
+              <a:t>07.10.2025</a:t>
             </a:fld>
             <a:endParaRPr lang="de-DE"/>
           </a:p>
@@ -3081,7 +2089,7 @@
           <a:p>
             <a:fld id="{C018A060-D51C-4243-8F88-61D66D5570B8}" type="slidenum">
               <a:rPr lang="de-DE" smtClean="0"/>
-              <a:t>‹Nr.›</a:t>
+              <a:t>‹#›</a:t>
             </a:fld>
             <a:endParaRPr lang="de-DE"/>
           </a:p>
@@ -3439,7 +2447,7 @@
           <a:p>
             <a:fld id="{ADA51F25-4808-47F4-BF6E-BCDC230DB01C}" type="datetimeFigureOut">
               <a:rPr lang="de-DE" smtClean="0"/>
-              <a:t>04.10.2025</a:t>
+              <a:t>07.10.2025</a:t>
             </a:fld>
             <a:endParaRPr lang="de-DE"/>
           </a:p>
@@ -3493,7 +2501,7 @@
           <a:p>
             <a:fld id="{C018A060-D51C-4243-8F88-61D66D5570B8}" type="slidenum">
               <a:rPr lang="de-DE" smtClean="0"/>
-              <a:t>‹Nr.›</a:t>
+              <a:t>‹#›</a:t>
             </a:fld>
             <a:endParaRPr lang="de-DE"/>
           </a:p>
@@ -3580,7 +2588,7 @@
           <a:p>
             <a:fld id="{ADA51F25-4808-47F4-BF6E-BCDC230DB01C}" type="datetimeFigureOut">
               <a:rPr lang="de-DE" smtClean="0"/>
-              <a:t>04.10.2025</a:t>
+              <a:t>07.10.2025</a:t>
             </a:fld>
             <a:endParaRPr lang="de-DE"/>
           </a:p>
@@ -3634,7 +2642,7 @@
           <a:p>
             <a:fld id="{C018A060-D51C-4243-8F88-61D66D5570B8}" type="slidenum">
               <a:rPr lang="de-DE" smtClean="0"/>
-              <a:t>‹Nr.›</a:t>
+              <a:t>‹#›</a:t>
             </a:fld>
             <a:endParaRPr lang="de-DE"/>
           </a:p>
@@ -3693,7 +2701,7 @@
           <a:p>
             <a:fld id="{ADA51F25-4808-47F4-BF6E-BCDC230DB01C}" type="datetimeFigureOut">
               <a:rPr lang="de-DE" smtClean="0"/>
-              <a:t>04.10.2025</a:t>
+              <a:t>07.10.2025</a:t>
             </a:fld>
             <a:endParaRPr lang="de-DE"/>
           </a:p>
@@ -3747,7 +2755,7 @@
           <a:p>
             <a:fld id="{C018A060-D51C-4243-8F88-61D66D5570B8}" type="slidenum">
               <a:rPr lang="de-DE" smtClean="0"/>
-              <a:t>‹Nr.›</a:t>
+              <a:t>‹#›</a:t>
             </a:fld>
             <a:endParaRPr lang="de-DE"/>
           </a:p>
@@ -4004,7 +3012,7 @@
           <a:p>
             <a:fld id="{ADA51F25-4808-47F4-BF6E-BCDC230DB01C}" type="datetimeFigureOut">
               <a:rPr lang="de-DE" smtClean="0"/>
-              <a:t>04.10.2025</a:t>
+              <a:t>07.10.2025</a:t>
             </a:fld>
             <a:endParaRPr lang="de-DE"/>
           </a:p>
@@ -4058,7 +3066,7 @@
           <a:p>
             <a:fld id="{C018A060-D51C-4243-8F88-61D66D5570B8}" type="slidenum">
               <a:rPr lang="de-DE" smtClean="0"/>
-              <a:t>‹Nr.›</a:t>
+              <a:t>‹#›</a:t>
             </a:fld>
             <a:endParaRPr lang="de-DE"/>
           </a:p>
@@ -4292,7 +3300,7 @@
           <a:p>
             <a:fld id="{ADA51F25-4808-47F4-BF6E-BCDC230DB01C}" type="datetimeFigureOut">
               <a:rPr lang="de-DE" smtClean="0"/>
-              <a:t>04.10.2025</a:t>
+              <a:t>07.10.2025</a:t>
             </a:fld>
             <a:endParaRPr lang="de-DE"/>
           </a:p>
@@ -4346,7 +3354,7 @@
           <a:p>
             <a:fld id="{C018A060-D51C-4243-8F88-61D66D5570B8}" type="slidenum">
               <a:rPr lang="de-DE" smtClean="0"/>
-              <a:t>‹Nr.›</a:t>
+              <a:t>‹#›</a:t>
             </a:fld>
             <a:endParaRPr lang="de-DE"/>
           </a:p>
@@ -4533,7 +3541,7 @@
           <a:p>
             <a:fld id="{ADA51F25-4808-47F4-BF6E-BCDC230DB01C}" type="datetimeFigureOut">
               <a:rPr lang="de-DE" smtClean="0"/>
-              <a:t>04.10.2025</a:t>
+              <a:t>07.10.2025</a:t>
             </a:fld>
             <a:endParaRPr lang="de-DE"/>
           </a:p>
@@ -4623,7 +3631,7 @@
           <a:p>
             <a:fld id="{C018A060-D51C-4243-8F88-61D66D5570B8}" type="slidenum">
               <a:rPr lang="de-DE" smtClean="0"/>
-              <a:t>‹Nr.›</a:t>
+              <a:t>‹#›</a:t>
             </a:fld>
             <a:endParaRPr lang="de-DE"/>
           </a:p>
@@ -4966,7 +3974,12 @@
             <p:ph type="ctrTitle"/>
           </p:nvPr>
         </p:nvSpPr>
-        <p:spPr/>
+        <p:spPr>
+          <a:xfrm>
+            <a:off x="1524000" y="2083063"/>
+            <a:ext cx="9144000" cy="2387600"/>
+          </a:xfrm>
+        </p:spPr>
         <p:txBody>
           <a:bodyPr>
             <a:normAutofit fontScale="90000"/>
@@ -4985,17 +3998,20 @@
               <a:t>(And everyone else!)</a:t>
             </a:r>
             <a:br>
-              <a:rPr lang="en-US" noProof="0" dirty="0"/>
+              <a:rPr lang="en-US" dirty="0"/>
             </a:br>
-            <a:r>
-              <a:rPr lang="en-US" noProof="0" dirty="0"/>
-              <a:t>Chunk 3: Logic Operators and </a:t>
-            </a:r>
             <a:br>
               <a:rPr lang="en-US" noProof="0" dirty="0"/>
             </a:br>
             <a:r>
-              <a:rPr lang="en-US" noProof="0" dirty="0"/>
+              <a:rPr lang="en-US" b="1" noProof="0" dirty="0"/>
+              <a:t>Chunk 3: Logic Operators and </a:t>
+            </a:r>
+            <a:br>
+              <a:rPr lang="en-US" b="1" noProof="0" dirty="0"/>
+            </a:br>
+            <a:r>
+              <a:rPr lang="en-US" b="1" noProof="0" dirty="0"/>
               <a:t>If-Statements</a:t>
             </a:r>
           </a:p>
@@ -5017,7 +4033,12 @@
             <p:ph type="subTitle" idx="1"/>
           </p:nvPr>
         </p:nvSpPr>
-        <p:spPr/>
+        <p:spPr>
+          <a:xfrm>
+            <a:off x="1524000" y="4747931"/>
+            <a:ext cx="9144000" cy="1655762"/>
+          </a:xfrm>
+        </p:spPr>
         <p:txBody>
           <a:bodyPr/>
           <a:lstStyle/>
@@ -5323,7 +4344,7 @@
         </p:nvSpPr>
         <p:spPr>
           <a:xfrm>
-            <a:off x="929640" y="1505299"/>
+            <a:off x="999088" y="752944"/>
             <a:ext cx="10515600" cy="1325563"/>
           </a:xfrm>
         </p:spPr>
@@ -5368,7 +4389,7 @@
         </p:blipFill>
         <p:spPr>
           <a:xfrm>
-            <a:off x="4477512" y="2780687"/>
+            <a:off x="4477512" y="2078507"/>
             <a:ext cx="3236976" cy="3839479"/>
           </a:xfrm>
           <a:prstGeom prst="rect">
@@ -5390,7 +4411,7 @@
         </p:nvSpPr>
         <p:spPr>
           <a:xfrm>
-            <a:off x="4477512" y="6581001"/>
+            <a:off x="3531366" y="5966556"/>
             <a:ext cx="5451044" cy="276999"/>
           </a:xfrm>
           <a:prstGeom prst="rect">
@@ -6256,9 +5277,6 @@
             <a:endParaRPr lang="en-US" dirty="0"/>
           </a:p>
           <a:p>
-            <a:endParaRPr lang="en-US" dirty="0"/>
-          </a:p>
-          <a:p>
             <a:pPr marL="0" indent="0">
               <a:buNone/>
             </a:pPr>
@@ -6315,7 +5333,7 @@
         </p:nvCxnSpPr>
         <p:spPr>
           <a:xfrm>
-            <a:off x="4019624" y="3077418"/>
+            <a:off x="9922713" y="2082145"/>
             <a:ext cx="804672" cy="0"/>
           </a:xfrm>
           <a:prstGeom prst="straightConnector1">
@@ -6362,7 +5380,7 @@
         </p:nvCxnSpPr>
         <p:spPr>
           <a:xfrm>
-            <a:off x="4824296" y="4104026"/>
+            <a:off x="4766423" y="3561025"/>
             <a:ext cx="471185" cy="0"/>
           </a:xfrm>
           <a:prstGeom prst="straightConnector1">
@@ -6415,7 +5433,7 @@
         </p:blipFill>
         <p:spPr>
           <a:xfrm>
-            <a:off x="2069960" y="2466494"/>
+            <a:off x="7973049" y="1471221"/>
             <a:ext cx="1671577" cy="1195872"/>
           </a:xfrm>
           <a:prstGeom prst="rect">
@@ -6455,7 +5473,7 @@
         </p:blipFill>
         <p:spPr>
           <a:xfrm>
-            <a:off x="5184930" y="2651665"/>
+            <a:off x="11005472" y="1633696"/>
             <a:ext cx="911070" cy="777335"/>
           </a:xfrm>
           <a:prstGeom prst="rect">
@@ -6495,7 +5513,7 @@
         </p:blipFill>
         <p:spPr>
           <a:xfrm>
-            <a:off x="1117380" y="4303235"/>
+            <a:off x="1117380" y="3999774"/>
             <a:ext cx="6509319" cy="2493101"/>
           </a:xfrm>
           <a:prstGeom prst="rect">
@@ -6519,7 +5537,7 @@
         </p:nvCxnSpPr>
         <p:spPr>
           <a:xfrm>
-            <a:off x="8162024" y="5633049"/>
+            <a:off x="8208323" y="5057307"/>
             <a:ext cx="471185" cy="0"/>
           </a:xfrm>
           <a:prstGeom prst="straightConnector1">
@@ -6564,7 +5582,7 @@
         </p:nvSpPr>
         <p:spPr>
           <a:xfrm>
-            <a:off x="7626699" y="6311900"/>
+            <a:off x="7626699" y="6162263"/>
             <a:ext cx="4139921" cy="461665"/>
           </a:xfrm>
           <a:prstGeom prst="rect">
@@ -6633,7 +5651,7 @@
         </p:blipFill>
         <p:spPr>
           <a:xfrm>
-            <a:off x="9281577" y="3561025"/>
+            <a:off x="9189412" y="3104906"/>
             <a:ext cx="1819529" cy="1086002"/>
           </a:xfrm>
           <a:prstGeom prst="rect">
@@ -6667,7 +5685,7 @@
         </p:nvCxnSpPr>
         <p:spPr>
           <a:xfrm flipV="1">
-            <a:off x="10191341" y="4846236"/>
+            <a:off x="10099176" y="4394823"/>
             <a:ext cx="0" cy="436795"/>
           </a:xfrm>
           <a:prstGeom prst="straightConnector1">
@@ -6708,6 +5726,251 @@
   <p:clrMapOvr>
     <a:masterClrMapping/>
   </p:clrMapOvr>
+  <p:timing>
+    <p:tnLst>
+      <p:par>
+        <p:cTn id="1" dur="indefinite" restart="never" nodeType="tmRoot">
+          <p:childTnLst>
+            <p:seq concurrent="1" nextAc="seek">
+              <p:cTn id="2" dur="indefinite" nodeType="mainSeq">
+                <p:childTnLst>
+                  <p:par>
+                    <p:cTn id="3" fill="hold">
+                      <p:stCondLst>
+                        <p:cond delay="indefinite"/>
+                      </p:stCondLst>
+                      <p:childTnLst>
+                        <p:par>
+                          <p:cTn id="4" fill="hold">
+                            <p:stCondLst>
+                              <p:cond delay="0"/>
+                            </p:stCondLst>
+                            <p:childTnLst>
+                              <p:par>
+                                <p:cTn id="5" presetID="1" presetClass="entr" presetSubtype="0" fill="hold" nodeType="clickEffect">
+                                  <p:stCondLst>
+                                    <p:cond delay="0"/>
+                                  </p:stCondLst>
+                                  <p:childTnLst>
+                                    <p:set>
+                                      <p:cBhvr>
+                                        <p:cTn id="6" dur="1" fill="hold">
+                                          <p:stCondLst>
+                                            <p:cond delay="0"/>
+                                          </p:stCondLst>
+                                        </p:cTn>
+                                        <p:tgtEl>
+                                          <p:spTgt spid="3">
+                                            <p:txEl>
+                                              <p:pRg st="3" end="3"/>
+                                            </p:txEl>
+                                          </p:spTgt>
+                                        </p:tgtEl>
+                                        <p:attrNameLst>
+                                          <p:attrName>style.visibility</p:attrName>
+                                        </p:attrNameLst>
+                                      </p:cBhvr>
+                                      <p:to>
+                                        <p:strVal val="visible"/>
+                                      </p:to>
+                                    </p:set>
+                                  </p:childTnLst>
+                                </p:cTn>
+                              </p:par>
+                              <p:par>
+                                <p:cTn id="7" presetID="1" presetClass="entr" presetSubtype="0" fill="hold" nodeType="withEffect">
+                                  <p:stCondLst>
+                                    <p:cond delay="0"/>
+                                  </p:stCondLst>
+                                  <p:childTnLst>
+                                    <p:set>
+                                      <p:cBhvr>
+                                        <p:cTn id="8" dur="1" fill="hold">
+                                          <p:stCondLst>
+                                            <p:cond delay="0"/>
+                                          </p:stCondLst>
+                                        </p:cTn>
+                                        <p:tgtEl>
+                                          <p:spTgt spid="21"/>
+                                        </p:tgtEl>
+                                        <p:attrNameLst>
+                                          <p:attrName>style.visibility</p:attrName>
+                                        </p:attrNameLst>
+                                      </p:cBhvr>
+                                      <p:to>
+                                        <p:strVal val="visible"/>
+                                      </p:to>
+                                    </p:set>
+                                  </p:childTnLst>
+                                </p:cTn>
+                              </p:par>
+                              <p:par>
+                                <p:cTn id="9" presetID="1" presetClass="entr" presetSubtype="0" fill="hold" nodeType="withEffect">
+                                  <p:stCondLst>
+                                    <p:cond delay="0"/>
+                                  </p:stCondLst>
+                                  <p:childTnLst>
+                                    <p:set>
+                                      <p:cBhvr>
+                                        <p:cTn id="10" dur="1" fill="hold">
+                                          <p:stCondLst>
+                                            <p:cond delay="0"/>
+                                          </p:stCondLst>
+                                        </p:cTn>
+                                        <p:tgtEl>
+                                          <p:spTgt spid="20"/>
+                                        </p:tgtEl>
+                                        <p:attrNameLst>
+                                          <p:attrName>style.visibility</p:attrName>
+                                        </p:attrNameLst>
+                                      </p:cBhvr>
+                                      <p:to>
+                                        <p:strVal val="visible"/>
+                                      </p:to>
+                                    </p:set>
+                                  </p:childTnLst>
+                                </p:cTn>
+                              </p:par>
+                              <p:par>
+                                <p:cTn id="11" presetID="1" presetClass="entr" presetSubtype="0" fill="hold" nodeType="withEffect">
+                                  <p:stCondLst>
+                                    <p:cond delay="0"/>
+                                  </p:stCondLst>
+                                  <p:childTnLst>
+                                    <p:set>
+                                      <p:cBhvr>
+                                        <p:cTn id="12" dur="1" fill="hold">
+                                          <p:stCondLst>
+                                            <p:cond delay="0"/>
+                                          </p:stCondLst>
+                                        </p:cTn>
+                                        <p:tgtEl>
+                                          <p:spTgt spid="24"/>
+                                        </p:tgtEl>
+                                        <p:attrNameLst>
+                                          <p:attrName>style.visibility</p:attrName>
+                                        </p:attrNameLst>
+                                      </p:cBhvr>
+                                      <p:to>
+                                        <p:strVal val="visible"/>
+                                      </p:to>
+                                    </p:set>
+                                  </p:childTnLst>
+                                </p:cTn>
+                              </p:par>
+                              <p:par>
+                                <p:cTn id="13" presetID="1" presetClass="entr" presetSubtype="0" fill="hold" nodeType="withEffect">
+                                  <p:stCondLst>
+                                    <p:cond delay="0"/>
+                                  </p:stCondLst>
+                                  <p:childTnLst>
+                                    <p:set>
+                                      <p:cBhvr>
+                                        <p:cTn id="14" dur="1" fill="hold">
+                                          <p:stCondLst>
+                                            <p:cond delay="0"/>
+                                          </p:stCondLst>
+                                        </p:cTn>
+                                        <p:tgtEl>
+                                          <p:spTgt spid="25"/>
+                                        </p:tgtEl>
+                                        <p:attrNameLst>
+                                          <p:attrName>style.visibility</p:attrName>
+                                        </p:attrNameLst>
+                                      </p:cBhvr>
+                                      <p:to>
+                                        <p:strVal val="visible"/>
+                                      </p:to>
+                                    </p:set>
+                                  </p:childTnLst>
+                                </p:cTn>
+                              </p:par>
+                              <p:par>
+                                <p:cTn id="15" presetID="1" presetClass="entr" presetSubtype="0" fill="hold" nodeType="withEffect">
+                                  <p:stCondLst>
+                                    <p:cond delay="0"/>
+                                  </p:stCondLst>
+                                  <p:childTnLst>
+                                    <p:set>
+                                      <p:cBhvr>
+                                        <p:cTn id="16" dur="1" fill="hold">
+                                          <p:stCondLst>
+                                            <p:cond delay="0"/>
+                                          </p:stCondLst>
+                                        </p:cTn>
+                                        <p:tgtEl>
+                                          <p:spTgt spid="3">
+                                            <p:txEl>
+                                              <p:pRg st="6" end="6"/>
+                                            </p:txEl>
+                                          </p:spTgt>
+                                        </p:tgtEl>
+                                        <p:attrNameLst>
+                                          <p:attrName>style.visibility</p:attrName>
+                                        </p:attrNameLst>
+                                      </p:cBhvr>
+                                      <p:to>
+                                        <p:strVal val="visible"/>
+                                      </p:to>
+                                    </p:set>
+                                  </p:childTnLst>
+                                </p:cTn>
+                              </p:par>
+                              <p:par>
+                                <p:cTn id="17" presetID="1" presetClass="entr" presetSubtype="0" fill="hold" nodeType="withEffect">
+                                  <p:stCondLst>
+                                    <p:cond delay="0"/>
+                                  </p:stCondLst>
+                                  <p:childTnLst>
+                                    <p:set>
+                                      <p:cBhvr>
+                                        <p:cTn id="18" dur="1" fill="hold">
+                                          <p:stCondLst>
+                                            <p:cond delay="0"/>
+                                          </p:stCondLst>
+                                        </p:cTn>
+                                        <p:tgtEl>
+                                          <p:spTgt spid="9"/>
+                                        </p:tgtEl>
+                                        <p:attrNameLst>
+                                          <p:attrName>style.visibility</p:attrName>
+                                        </p:attrNameLst>
+                                      </p:cBhvr>
+                                      <p:to>
+                                        <p:strVal val="visible"/>
+                                      </p:to>
+                                    </p:set>
+                                  </p:childTnLst>
+                                </p:cTn>
+                              </p:par>
+                            </p:childTnLst>
+                          </p:cTn>
+                        </p:par>
+                      </p:childTnLst>
+                    </p:cTn>
+                  </p:par>
+                </p:childTnLst>
+              </p:cTn>
+              <p:prevCondLst>
+                <p:cond evt="onPrev" delay="0">
+                  <p:tgtEl>
+                    <p:sldTgt/>
+                  </p:tgtEl>
+                </p:cond>
+              </p:prevCondLst>
+              <p:nextCondLst>
+                <p:cond evt="onNext" delay="0">
+                  <p:tgtEl>
+                    <p:sldTgt/>
+                  </p:tgtEl>
+                </p:cond>
+              </p:nextCondLst>
+            </p:seq>
+          </p:childTnLst>
+        </p:cTn>
+      </p:par>
+    </p:tnLst>
+  </p:timing>
 </p:sld>
 </file>
 
@@ -6781,7 +6044,7 @@
         </p:blipFill>
         <p:spPr>
           <a:xfrm>
-            <a:off x="927043" y="1580492"/>
+            <a:off x="1274753" y="1580492"/>
             <a:ext cx="4067743" cy="2048161"/>
           </a:xfrm>
           <a:prstGeom prst="rect">
@@ -6821,7 +6084,7 @@
         </p:blipFill>
         <p:spPr>
           <a:xfrm>
-            <a:off x="5795665" y="1637650"/>
+            <a:off x="6567861" y="1637650"/>
             <a:ext cx="4258269" cy="1991003"/>
           </a:xfrm>
           <a:prstGeom prst="rect">
@@ -6861,7 +6124,7 @@
         </p:blipFill>
         <p:spPr>
           <a:xfrm>
-            <a:off x="679815" y="4158618"/>
+            <a:off x="927043" y="4158617"/>
             <a:ext cx="4763165" cy="2057687"/>
           </a:xfrm>
           <a:prstGeom prst="rect">
@@ -6901,7 +6164,7 @@
         </p:blipFill>
         <p:spPr>
           <a:xfrm>
-            <a:off x="6331752" y="4158618"/>
+            <a:off x="6320176" y="4158616"/>
             <a:ext cx="4753638" cy="2057687"/>
           </a:xfrm>
           <a:prstGeom prst="rect">
@@ -6929,6 +6192,171 @@
   <p:clrMapOvr>
     <a:masterClrMapping/>
   </p:clrMapOvr>
+  <p:timing>
+    <p:tnLst>
+      <p:par>
+        <p:cTn id="1" dur="indefinite" restart="never" nodeType="tmRoot">
+          <p:childTnLst>
+            <p:seq concurrent="1" nextAc="seek">
+              <p:cTn id="2" dur="indefinite" nodeType="mainSeq">
+                <p:childTnLst>
+                  <p:par>
+                    <p:cTn id="3" fill="hold">
+                      <p:stCondLst>
+                        <p:cond delay="indefinite"/>
+                      </p:stCondLst>
+                      <p:childTnLst>
+                        <p:par>
+                          <p:cTn id="4" fill="hold">
+                            <p:stCondLst>
+                              <p:cond delay="0"/>
+                            </p:stCondLst>
+                            <p:childTnLst>
+                              <p:par>
+                                <p:cTn id="5" presetID="1" presetClass="entr" presetSubtype="0" fill="hold" nodeType="clickEffect">
+                                  <p:stCondLst>
+                                    <p:cond delay="0"/>
+                                  </p:stCondLst>
+                                  <p:childTnLst>
+                                    <p:set>
+                                      <p:cBhvr>
+                                        <p:cTn id="6" dur="1" fill="hold">
+                                          <p:stCondLst>
+                                            <p:cond delay="0"/>
+                                          </p:stCondLst>
+                                        </p:cTn>
+                                        <p:tgtEl>
+                                          <p:spTgt spid="7"/>
+                                        </p:tgtEl>
+                                        <p:attrNameLst>
+                                          <p:attrName>style.visibility</p:attrName>
+                                        </p:attrNameLst>
+                                      </p:cBhvr>
+                                      <p:to>
+                                        <p:strVal val="visible"/>
+                                      </p:to>
+                                    </p:set>
+                                  </p:childTnLst>
+                                </p:cTn>
+                              </p:par>
+                            </p:childTnLst>
+                          </p:cTn>
+                        </p:par>
+                      </p:childTnLst>
+                    </p:cTn>
+                  </p:par>
+                  <p:par>
+                    <p:cTn id="7" fill="hold">
+                      <p:stCondLst>
+                        <p:cond delay="indefinite"/>
+                      </p:stCondLst>
+                      <p:childTnLst>
+                        <p:par>
+                          <p:cTn id="8" fill="hold">
+                            <p:stCondLst>
+                              <p:cond delay="0"/>
+                            </p:stCondLst>
+                            <p:childTnLst>
+                              <p:par>
+                                <p:cTn id="9" presetID="1" presetClass="entr" presetSubtype="0" fill="hold" nodeType="clickEffect">
+                                  <p:stCondLst>
+                                    <p:cond delay="0"/>
+                                  </p:stCondLst>
+                                  <p:childTnLst>
+                                    <p:set>
+                                      <p:cBhvr>
+                                        <p:cTn id="10" dur="1" fill="hold">
+                                          <p:stCondLst>
+                                            <p:cond delay="0"/>
+                                          </p:stCondLst>
+                                        </p:cTn>
+                                        <p:tgtEl>
+                                          <p:spTgt spid="9"/>
+                                        </p:tgtEl>
+                                        <p:attrNameLst>
+                                          <p:attrName>style.visibility</p:attrName>
+                                        </p:attrNameLst>
+                                      </p:cBhvr>
+                                      <p:to>
+                                        <p:strVal val="visible"/>
+                                      </p:to>
+                                    </p:set>
+                                  </p:childTnLst>
+                                </p:cTn>
+                              </p:par>
+                            </p:childTnLst>
+                          </p:cTn>
+                        </p:par>
+                      </p:childTnLst>
+                    </p:cTn>
+                  </p:par>
+                  <p:par>
+                    <p:cTn id="11" fill="hold">
+                      <p:stCondLst>
+                        <p:cond delay="indefinite"/>
+                      </p:stCondLst>
+                      <p:childTnLst>
+                        <p:par>
+                          <p:cTn id="12" fill="hold">
+                            <p:stCondLst>
+                              <p:cond delay="0"/>
+                            </p:stCondLst>
+                            <p:childTnLst>
+                              <p:par>
+                                <p:cTn id="13" presetID="1" presetClass="entr" presetSubtype="0" fill="hold" nodeType="clickEffect">
+                                  <p:stCondLst>
+                                    <p:cond delay="0"/>
+                                  </p:stCondLst>
+                                  <p:childTnLst>
+                                    <p:set>
+                                      <p:cBhvr>
+                                        <p:cTn id="14" dur="1" fill="hold">
+                                          <p:stCondLst>
+                                            <p:cond delay="0"/>
+                                          </p:stCondLst>
+                                        </p:cTn>
+                                        <p:tgtEl>
+                                          <p:spTgt spid="11"/>
+                                        </p:tgtEl>
+                                        <p:attrNameLst>
+                                          <p:attrName>style.visibility</p:attrName>
+                                        </p:attrNameLst>
+                                      </p:cBhvr>
+                                      <p:to>
+                                        <p:strVal val="visible"/>
+                                      </p:to>
+                                    </p:set>
+                                  </p:childTnLst>
+                                </p:cTn>
+                              </p:par>
+                            </p:childTnLst>
+                          </p:cTn>
+                        </p:par>
+                      </p:childTnLst>
+                    </p:cTn>
+                  </p:par>
+                </p:childTnLst>
+              </p:cTn>
+              <p:prevCondLst>
+                <p:cond evt="onPrev" delay="0">
+                  <p:tgtEl>
+                    <p:sldTgt/>
+                  </p:tgtEl>
+                </p:cond>
+              </p:prevCondLst>
+              <p:nextCondLst>
+                <p:cond evt="onNext" delay="0">
+                  <p:tgtEl>
+                    <p:sldTgt/>
+                  </p:tgtEl>
+                </p:cond>
+              </p:nextCondLst>
+            </p:seq>
+          </p:childTnLst>
+        </p:cTn>
+      </p:par>
+    </p:tnLst>
+  </p:timing>
 </p:sld>
 </file>
 
@@ -6970,6 +6398,7 @@
           <a:bodyPr/>
           <a:lstStyle/>
           <a:p>
+            <a:pPr algn="ctr"/>
             <a:r>
               <a:rPr lang="en-US" dirty="0"/>
               <a:t>Anecdote: Traction Control</a:t>
@@ -7025,7 +6454,7 @@
         </p:blipFill>
         <p:spPr>
           <a:xfrm>
-            <a:off x="736143" y="1624489"/>
+            <a:off x="2751607" y="1690688"/>
             <a:ext cx="6688785" cy="4753609"/>
           </a:xfrm>
           <a:prstGeom prst="rect">
@@ -7047,7 +6476,7 @@
         </p:nvSpPr>
         <p:spPr>
           <a:xfrm>
-            <a:off x="1488708" y="2420077"/>
+            <a:off x="3504172" y="2486276"/>
             <a:ext cx="2708387" cy="606587"/>
           </a:xfrm>
           <a:prstGeom prst="rect">
@@ -7101,7 +6530,7 @@
         </p:nvSpPr>
         <p:spPr>
           <a:xfrm>
-            <a:off x="1305828" y="3570732"/>
+            <a:off x="3321292" y="3636931"/>
             <a:ext cx="797291" cy="260605"/>
           </a:xfrm>
           <a:prstGeom prst="rect">
@@ -7358,6 +6787,227 @@
   <p:clrMapOvr>
     <a:masterClrMapping/>
   </p:clrMapOvr>
+  <p:timing>
+    <p:tnLst>
+      <p:par>
+        <p:cTn id="1" dur="indefinite" restart="never" nodeType="tmRoot">
+          <p:childTnLst>
+            <p:seq concurrent="1" nextAc="seek">
+              <p:cTn id="2" dur="indefinite" nodeType="mainSeq">
+                <p:childTnLst>
+                  <p:par>
+                    <p:cTn id="3" fill="hold">
+                      <p:stCondLst>
+                        <p:cond delay="indefinite"/>
+                      </p:stCondLst>
+                      <p:childTnLst>
+                        <p:par>
+                          <p:cTn id="4" fill="hold">
+                            <p:stCondLst>
+                              <p:cond delay="0"/>
+                            </p:stCondLst>
+                            <p:childTnLst>
+                              <p:par>
+                                <p:cTn id="5" presetID="1" presetClass="entr" presetSubtype="0" fill="hold" nodeType="clickEffect">
+                                  <p:stCondLst>
+                                    <p:cond delay="0"/>
+                                  </p:stCondLst>
+                                  <p:childTnLst>
+                                    <p:set>
+                                      <p:cBhvr>
+                                        <p:cTn id="6" dur="1" fill="hold">
+                                          <p:stCondLst>
+                                            <p:cond delay="0"/>
+                                          </p:stCondLst>
+                                        </p:cTn>
+                                        <p:tgtEl>
+                                          <p:spTgt spid="3">
+                                            <p:txEl>
+                                              <p:pRg st="3" end="3"/>
+                                            </p:txEl>
+                                          </p:spTgt>
+                                        </p:tgtEl>
+                                        <p:attrNameLst>
+                                          <p:attrName>style.visibility</p:attrName>
+                                        </p:attrNameLst>
+                                      </p:cBhvr>
+                                      <p:to>
+                                        <p:strVal val="visible"/>
+                                      </p:to>
+                                    </p:set>
+                                  </p:childTnLst>
+                                </p:cTn>
+                              </p:par>
+                              <p:par>
+                                <p:cTn id="7" presetID="1" presetClass="entr" presetSubtype="0" fill="hold" nodeType="withEffect">
+                                  <p:stCondLst>
+                                    <p:cond delay="0"/>
+                                  </p:stCondLst>
+                                  <p:childTnLst>
+                                    <p:set>
+                                      <p:cBhvr>
+                                        <p:cTn id="8" dur="1" fill="hold">
+                                          <p:stCondLst>
+                                            <p:cond delay="0"/>
+                                          </p:stCondLst>
+                                        </p:cTn>
+                                        <p:tgtEl>
+                                          <p:spTgt spid="3">
+                                            <p:txEl>
+                                              <p:pRg st="4" end="4"/>
+                                            </p:txEl>
+                                          </p:spTgt>
+                                        </p:tgtEl>
+                                        <p:attrNameLst>
+                                          <p:attrName>style.visibility</p:attrName>
+                                        </p:attrNameLst>
+                                      </p:cBhvr>
+                                      <p:to>
+                                        <p:strVal val="visible"/>
+                                      </p:to>
+                                    </p:set>
+                                  </p:childTnLst>
+                                </p:cTn>
+                              </p:par>
+                              <p:par>
+                                <p:cTn id="9" presetID="1" presetClass="entr" presetSubtype="0" fill="hold" nodeType="withEffect">
+                                  <p:stCondLst>
+                                    <p:cond delay="0"/>
+                                  </p:stCondLst>
+                                  <p:childTnLst>
+                                    <p:set>
+                                      <p:cBhvr>
+                                        <p:cTn id="10" dur="1" fill="hold">
+                                          <p:stCondLst>
+                                            <p:cond delay="0"/>
+                                          </p:stCondLst>
+                                        </p:cTn>
+                                        <p:tgtEl>
+                                          <p:spTgt spid="3">
+                                            <p:txEl>
+                                              <p:pRg st="5" end="5"/>
+                                            </p:txEl>
+                                          </p:spTgt>
+                                        </p:tgtEl>
+                                        <p:attrNameLst>
+                                          <p:attrName>style.visibility</p:attrName>
+                                        </p:attrNameLst>
+                                      </p:cBhvr>
+                                      <p:to>
+                                        <p:strVal val="visible"/>
+                                      </p:to>
+                                    </p:set>
+                                  </p:childTnLst>
+                                </p:cTn>
+                              </p:par>
+                              <p:par>
+                                <p:cTn id="11" presetID="1" presetClass="entr" presetSubtype="0" fill="hold" nodeType="withEffect">
+                                  <p:stCondLst>
+                                    <p:cond delay="0"/>
+                                  </p:stCondLst>
+                                  <p:childTnLst>
+                                    <p:set>
+                                      <p:cBhvr>
+                                        <p:cTn id="12" dur="1" fill="hold">
+                                          <p:stCondLst>
+                                            <p:cond delay="0"/>
+                                          </p:stCondLst>
+                                        </p:cTn>
+                                        <p:tgtEl>
+                                          <p:spTgt spid="3">
+                                            <p:txEl>
+                                              <p:pRg st="6" end="6"/>
+                                            </p:txEl>
+                                          </p:spTgt>
+                                        </p:tgtEl>
+                                        <p:attrNameLst>
+                                          <p:attrName>style.visibility</p:attrName>
+                                        </p:attrNameLst>
+                                      </p:cBhvr>
+                                      <p:to>
+                                        <p:strVal val="visible"/>
+                                      </p:to>
+                                    </p:set>
+                                  </p:childTnLst>
+                                </p:cTn>
+                              </p:par>
+                            </p:childTnLst>
+                          </p:cTn>
+                        </p:par>
+                      </p:childTnLst>
+                    </p:cTn>
+                  </p:par>
+                  <p:par>
+                    <p:cTn id="13" fill="hold">
+                      <p:stCondLst>
+                        <p:cond delay="indefinite"/>
+                      </p:stCondLst>
+                      <p:childTnLst>
+                        <p:par>
+                          <p:cTn id="14" fill="hold">
+                            <p:stCondLst>
+                              <p:cond delay="0"/>
+                            </p:stCondLst>
+                            <p:childTnLst>
+                              <p:par>
+                                <p:cTn id="15" presetID="1" presetClass="entr" presetSubtype="0" fill="hold" nodeType="clickEffect">
+                                  <p:stCondLst>
+                                    <p:cond delay="0"/>
+                                  </p:stCondLst>
+                                  <p:childTnLst>
+                                    <p:set>
+                                      <p:cBhvr>
+                                        <p:cTn id="16" dur="1" fill="hold">
+                                          <p:stCondLst>
+                                            <p:cond delay="0"/>
+                                          </p:stCondLst>
+                                        </p:cTn>
+                                        <p:tgtEl>
+                                          <p:spTgt spid="3">
+                                            <p:txEl>
+                                              <p:pRg st="7" end="7"/>
+                                            </p:txEl>
+                                          </p:spTgt>
+                                        </p:tgtEl>
+                                        <p:attrNameLst>
+                                          <p:attrName>style.visibility</p:attrName>
+                                        </p:attrNameLst>
+                                      </p:cBhvr>
+                                      <p:to>
+                                        <p:strVal val="visible"/>
+                                      </p:to>
+                                    </p:set>
+                                  </p:childTnLst>
+                                </p:cTn>
+                              </p:par>
+                            </p:childTnLst>
+                          </p:cTn>
+                        </p:par>
+                      </p:childTnLst>
+                    </p:cTn>
+                  </p:par>
+                </p:childTnLst>
+              </p:cTn>
+              <p:prevCondLst>
+                <p:cond evt="onPrev" delay="0">
+                  <p:tgtEl>
+                    <p:sldTgt/>
+                  </p:tgtEl>
+                </p:cond>
+              </p:prevCondLst>
+              <p:nextCondLst>
+                <p:cond evt="onNext" delay="0">
+                  <p:tgtEl>
+                    <p:sldTgt/>
+                  </p:tgtEl>
+                </p:cond>
+              </p:nextCondLst>
+            </p:seq>
+          </p:childTnLst>
+        </p:cTn>
+      </p:par>
+    </p:tnLst>
+  </p:timing>
 </p:sld>
 </file>
 
@@ -7394,16 +7044,22 @@
             <p:ph type="title"/>
           </p:nvPr>
         </p:nvSpPr>
-        <p:spPr/>
+        <p:spPr>
+          <a:xfrm>
+            <a:off x="-95581" y="-123497"/>
+            <a:ext cx="10515600" cy="1325563"/>
+          </a:xfrm>
+        </p:spPr>
         <p:txBody>
           <a:bodyPr/>
           <a:lstStyle/>
           <a:p>
-            <a:r>
-              <a:rPr lang="en-US" dirty="0"/>
+            <a:pPr algn="ctr"/>
+            <a:r>
+              <a:rPr lang="en-US" b="1" dirty="0"/>
               <a:t>else - Statement</a:t>
             </a:r>
-            <a:endParaRPr lang="de-DE" dirty="0"/>
+            <a:endParaRPr lang="de-DE" b="1" dirty="0"/>
           </a:p>
         </p:txBody>
       </p:sp>
@@ -7421,7 +7077,7 @@
         </p:nvSpPr>
         <p:spPr>
           <a:xfrm>
-            <a:off x="7440998" y="1892146"/>
+            <a:off x="7377023" y="1861255"/>
             <a:ext cx="2733427" cy="841248"/>
           </a:xfrm>
           <a:prstGeom prst="roundRect">
@@ -7482,7 +7138,7 @@
         </p:nvSpPr>
         <p:spPr>
           <a:xfrm>
-            <a:off x="9400426" y="3718437"/>
+            <a:off x="9336451" y="3687546"/>
             <a:ext cx="2733427" cy="841248"/>
           </a:xfrm>
           <a:prstGeom prst="roundRect">
@@ -7538,7 +7194,7 @@
         </p:nvSpPr>
         <p:spPr>
           <a:xfrm>
-            <a:off x="7440997" y="665242"/>
+            <a:off x="7377022" y="634351"/>
             <a:ext cx="2733427" cy="841248"/>
           </a:xfrm>
           <a:prstGeom prst="roundRect">
@@ -7594,7 +7250,7 @@
         </p:nvSpPr>
         <p:spPr>
           <a:xfrm>
-            <a:off x="7440997" y="5299444"/>
+            <a:off x="7377022" y="5268553"/>
             <a:ext cx="2733427" cy="841248"/>
           </a:xfrm>
           <a:prstGeom prst="roundRect">
@@ -7654,7 +7310,7 @@
         </p:nvCxnSpPr>
         <p:spPr>
           <a:xfrm>
-            <a:off x="8807712" y="2733394"/>
+            <a:off x="8743737" y="2702503"/>
             <a:ext cx="1959428" cy="985043"/>
           </a:xfrm>
           <a:prstGeom prst="straightConnector1">
@@ -7698,7 +7354,7 @@
         </p:nvCxnSpPr>
         <p:spPr>
           <a:xfrm>
-            <a:off x="8807711" y="1506490"/>
+            <a:off x="8743736" y="1475599"/>
             <a:ext cx="1" cy="385656"/>
           </a:xfrm>
           <a:prstGeom prst="straightConnector1">
@@ -7742,7 +7398,7 @@
         </p:nvCxnSpPr>
         <p:spPr>
           <a:xfrm flipH="1">
-            <a:off x="8807711" y="4559685"/>
+            <a:off x="8743736" y="4528794"/>
             <a:ext cx="1959429" cy="739759"/>
           </a:xfrm>
           <a:prstGeom prst="straightConnector1">
@@ -7782,7 +7438,7 @@
         </p:nvSpPr>
         <p:spPr>
           <a:xfrm>
-            <a:off x="9523790" y="3068367"/>
+            <a:off x="9459815" y="3037476"/>
             <a:ext cx="650634" cy="369332"/>
           </a:xfrm>
           <a:prstGeom prst="rect">
@@ -7828,7 +7484,7 @@
         </p:nvCxnSpPr>
         <p:spPr>
           <a:xfrm flipH="1">
-            <a:off x="7692311" y="2733394"/>
+            <a:off x="7628336" y="2702503"/>
             <a:ext cx="1115399" cy="946306"/>
           </a:xfrm>
           <a:prstGeom prst="straightConnector1">
@@ -7870,7 +7526,7 @@
         </p:nvCxnSpPr>
         <p:spPr>
           <a:xfrm>
-            <a:off x="7692311" y="4559685"/>
+            <a:off x="7628336" y="4528794"/>
             <a:ext cx="1195247" cy="739759"/>
           </a:xfrm>
           <a:prstGeom prst="straightConnector1">
@@ -7910,7 +7566,7 @@
         </p:nvSpPr>
         <p:spPr>
           <a:xfrm>
-            <a:off x="6325597" y="3679700"/>
+            <a:off x="6261622" y="3648809"/>
             <a:ext cx="2733427" cy="841248"/>
           </a:xfrm>
           <a:prstGeom prst="roundRect">
@@ -7966,7 +7622,7 @@
         </p:nvSpPr>
         <p:spPr>
           <a:xfrm>
-            <a:off x="7862682" y="3043875"/>
+            <a:off x="7798707" y="3012984"/>
             <a:ext cx="774656" cy="369332"/>
           </a:xfrm>
           <a:prstGeom prst="rect">
@@ -8009,7 +7665,7 @@
         </p:nvSpPr>
         <p:spPr>
           <a:xfrm>
-            <a:off x="246052" y="2511325"/>
+            <a:off x="130425" y="1861255"/>
             <a:ext cx="2733427" cy="841248"/>
           </a:xfrm>
           <a:prstGeom prst="roundRect">
@@ -8070,7 +7726,7 @@
         </p:nvSpPr>
         <p:spPr>
           <a:xfrm>
-            <a:off x="2104997" y="4337616"/>
+            <a:off x="1989370" y="3687546"/>
             <a:ext cx="2733427" cy="841248"/>
           </a:xfrm>
           <a:prstGeom prst="roundRect">
@@ -8126,7 +7782,7 @@
         </p:nvSpPr>
         <p:spPr>
           <a:xfrm>
-            <a:off x="246051" y="1284421"/>
+            <a:off x="130424" y="634351"/>
             <a:ext cx="2733427" cy="841248"/>
           </a:xfrm>
           <a:prstGeom prst="roundRect">
@@ -8182,7 +7838,7 @@
         </p:nvSpPr>
         <p:spPr>
           <a:xfrm>
-            <a:off x="246051" y="5918623"/>
+            <a:off x="130424" y="5268553"/>
             <a:ext cx="2733427" cy="841248"/>
           </a:xfrm>
           <a:prstGeom prst="roundRect">
@@ -8242,7 +7898,7 @@
         </p:nvCxnSpPr>
         <p:spPr>
           <a:xfrm>
-            <a:off x="1612766" y="3352573"/>
+            <a:off x="1497139" y="2702503"/>
             <a:ext cx="1858945" cy="985043"/>
           </a:xfrm>
           <a:prstGeom prst="straightConnector1">
@@ -8286,7 +7942,7 @@
         </p:nvCxnSpPr>
         <p:spPr>
           <a:xfrm>
-            <a:off x="1612765" y="2125669"/>
+            <a:off x="1497138" y="1475599"/>
             <a:ext cx="1" cy="385656"/>
           </a:xfrm>
           <a:prstGeom prst="straightConnector1">
@@ -8330,7 +7986,7 @@
         </p:nvCxnSpPr>
         <p:spPr>
           <a:xfrm flipH="1">
-            <a:off x="1612765" y="3352573"/>
+            <a:off x="1497138" y="2702503"/>
             <a:ext cx="1" cy="2566050"/>
           </a:xfrm>
           <a:prstGeom prst="straightConnector1">
@@ -8372,7 +8028,7 @@
         </p:nvCxnSpPr>
         <p:spPr>
           <a:xfrm flipH="1">
-            <a:off x="1612765" y="5178864"/>
+            <a:off x="1497138" y="4528794"/>
             <a:ext cx="1858946" cy="739759"/>
           </a:xfrm>
           <a:prstGeom prst="straightConnector1">
@@ -8412,7 +8068,7 @@
         </p:nvSpPr>
         <p:spPr>
           <a:xfrm>
-            <a:off x="2328844" y="3687546"/>
+            <a:off x="2213217" y="3037476"/>
             <a:ext cx="650634" cy="369332"/>
           </a:xfrm>
           <a:prstGeom prst="rect">
@@ -8455,7 +8111,7 @@
         </p:nvSpPr>
         <p:spPr>
           <a:xfrm>
-            <a:off x="1225438" y="3834363"/>
+            <a:off x="1109811" y="3184293"/>
             <a:ext cx="774656" cy="369332"/>
           </a:xfrm>
           <a:prstGeom prst="rect">
@@ -9424,7 +9080,12 @@
             <p:ph idx="1"/>
           </p:nvPr>
         </p:nvSpPr>
-        <p:spPr/>
+        <p:spPr>
+          <a:xfrm>
+            <a:off x="838200" y="1690688"/>
+            <a:ext cx="10515600" cy="4351338"/>
+          </a:xfrm>
+        </p:spPr>
         <p:txBody>
           <a:bodyPr/>
           <a:lstStyle/>
@@ -10279,7 +9940,7 @@
         </p:nvSpPr>
         <p:spPr>
           <a:xfrm>
-            <a:off x="1941786" y="3928461"/>
+            <a:off x="1941786" y="3995593"/>
             <a:ext cx="787395" cy="1446550"/>
           </a:xfrm>
           <a:prstGeom prst="rect">
